--- a/src/data/images.pptx
+++ b/src/data/images.pptx
@@ -12,6 +12,7 @@
     <p:sldId id="260" r:id="rId6"/>
     <p:sldId id="261" r:id="rId7"/>
     <p:sldId id="262" r:id="rId8"/>
+    <p:sldId id="263" r:id="rId9"/>
   </p:sldIdLst>
   <p:sldSz cx="12192000" cy="6858000"/>
   <p:notesSz cx="6858000" cy="9144000"/>
@@ -265,7 +266,7 @@
           <a:p>
             <a:fld id="{621A180A-8C38-4DA9-BE14-020F85743E22}" type="datetimeFigureOut">
               <a:rPr lang="en-US" smtClean="0"/>
-              <a:t>1/29/2025</a:t>
+              <a:t>4/24/2025</a:t>
             </a:fld>
             <a:endParaRPr lang="en-US"/>
           </a:p>
@@ -463,7 +464,7 @@
           <a:p>
             <a:fld id="{621A180A-8C38-4DA9-BE14-020F85743E22}" type="datetimeFigureOut">
               <a:rPr lang="en-US" smtClean="0"/>
-              <a:t>1/29/2025</a:t>
+              <a:t>4/24/2025</a:t>
             </a:fld>
             <a:endParaRPr lang="en-US"/>
           </a:p>
@@ -671,7 +672,7 @@
           <a:p>
             <a:fld id="{621A180A-8C38-4DA9-BE14-020F85743E22}" type="datetimeFigureOut">
               <a:rPr lang="en-US" smtClean="0"/>
-              <a:t>1/29/2025</a:t>
+              <a:t>4/24/2025</a:t>
             </a:fld>
             <a:endParaRPr lang="en-US"/>
           </a:p>
@@ -869,7 +870,7 @@
           <a:p>
             <a:fld id="{621A180A-8C38-4DA9-BE14-020F85743E22}" type="datetimeFigureOut">
               <a:rPr lang="en-US" smtClean="0"/>
-              <a:t>1/29/2025</a:t>
+              <a:t>4/24/2025</a:t>
             </a:fld>
             <a:endParaRPr lang="en-US"/>
           </a:p>
@@ -1144,7 +1145,7 @@
           <a:p>
             <a:fld id="{621A180A-8C38-4DA9-BE14-020F85743E22}" type="datetimeFigureOut">
               <a:rPr lang="en-US" smtClean="0"/>
-              <a:t>1/29/2025</a:t>
+              <a:t>4/24/2025</a:t>
             </a:fld>
             <a:endParaRPr lang="en-US"/>
           </a:p>
@@ -1409,7 +1410,7 @@
           <a:p>
             <a:fld id="{621A180A-8C38-4DA9-BE14-020F85743E22}" type="datetimeFigureOut">
               <a:rPr lang="en-US" smtClean="0"/>
-              <a:t>1/29/2025</a:t>
+              <a:t>4/24/2025</a:t>
             </a:fld>
             <a:endParaRPr lang="en-US"/>
           </a:p>
@@ -1821,7 +1822,7 @@
           <a:p>
             <a:fld id="{621A180A-8C38-4DA9-BE14-020F85743E22}" type="datetimeFigureOut">
               <a:rPr lang="en-US" smtClean="0"/>
-              <a:t>1/29/2025</a:t>
+              <a:t>4/24/2025</a:t>
             </a:fld>
             <a:endParaRPr lang="en-US"/>
           </a:p>
@@ -1962,7 +1963,7 @@
           <a:p>
             <a:fld id="{621A180A-8C38-4DA9-BE14-020F85743E22}" type="datetimeFigureOut">
               <a:rPr lang="en-US" smtClean="0"/>
-              <a:t>1/29/2025</a:t>
+              <a:t>4/24/2025</a:t>
             </a:fld>
             <a:endParaRPr lang="en-US"/>
           </a:p>
@@ -2075,7 +2076,7 @@
           <a:p>
             <a:fld id="{621A180A-8C38-4DA9-BE14-020F85743E22}" type="datetimeFigureOut">
               <a:rPr lang="en-US" smtClean="0"/>
-              <a:t>1/29/2025</a:t>
+              <a:t>4/24/2025</a:t>
             </a:fld>
             <a:endParaRPr lang="en-US"/>
           </a:p>
@@ -2386,7 +2387,7 @@
           <a:p>
             <a:fld id="{621A180A-8C38-4DA9-BE14-020F85743E22}" type="datetimeFigureOut">
               <a:rPr lang="en-US" smtClean="0"/>
-              <a:t>1/29/2025</a:t>
+              <a:t>4/24/2025</a:t>
             </a:fld>
             <a:endParaRPr lang="en-US"/>
           </a:p>
@@ -2674,7 +2675,7 @@
           <a:p>
             <a:fld id="{621A180A-8C38-4DA9-BE14-020F85743E22}" type="datetimeFigureOut">
               <a:rPr lang="en-US" smtClean="0"/>
-              <a:t>1/29/2025</a:t>
+              <a:t>4/24/2025</a:t>
             </a:fld>
             <a:endParaRPr lang="en-US"/>
           </a:p>
@@ -2915,7 +2916,7 @@
           <a:p>
             <a:fld id="{621A180A-8C38-4DA9-BE14-020F85743E22}" type="datetimeFigureOut">
               <a:rPr lang="en-US" smtClean="0"/>
-              <a:t>1/29/2025</a:t>
+              <a:t>4/24/2025</a:t>
             </a:fld>
             <a:endParaRPr lang="en-US"/>
           </a:p>
@@ -4078,6 +4079,103 @@
 </p:sld>
 </file>
 
+<file path=ppt/slides/slide8.xml><?xml version="1.0" encoding="utf-8"?>
+<p:sld xmlns:a="http://schemas.openxmlformats.org/drawingml/2006/main" xmlns:r="http://schemas.openxmlformats.org/officeDocument/2006/relationships" xmlns:p="http://schemas.openxmlformats.org/presentationml/2006/main">
+  <p:cSld>
+    <p:spTree>
+      <p:nvGrpSpPr>
+        <p:cNvPr id="1" name=""/>
+        <p:cNvGrpSpPr/>
+        <p:nvPr/>
+      </p:nvGrpSpPr>
+      <p:grpSpPr>
+        <a:xfrm>
+          <a:off x="0" y="0"/>
+          <a:ext cx="0" cy="0"/>
+          <a:chOff x="0" y="0"/>
+          <a:chExt cx="0" cy="0"/>
+        </a:xfrm>
+      </p:grpSpPr>
+      <p:sp>
+        <p:nvSpPr>
+          <p:cNvPr id="2" name="Title 1">
+            <a:extLst>
+              <a:ext uri="{FF2B5EF4-FFF2-40B4-BE49-F238E27FC236}">
+                <a16:creationId xmlns:a16="http://schemas.microsoft.com/office/drawing/2014/main" id="{6F25426D-49CE-4866-992B-BD5EE93A10DA}"/>
+              </a:ext>
+            </a:extLst>
+          </p:cNvPr>
+          <p:cNvSpPr>
+            <a:spLocks noGrp="1"/>
+          </p:cNvSpPr>
+          <p:nvPr>
+            <p:ph type="title"/>
+          </p:nvPr>
+        </p:nvSpPr>
+        <p:spPr/>
+        <p:txBody>
+          <a:bodyPr/>
+          <a:lstStyle/>
+          <a:p>
+            <a:endParaRPr lang="en-US"/>
+          </a:p>
+        </p:txBody>
+      </p:sp>
+      <p:pic>
+        <p:nvPicPr>
+          <p:cNvPr id="5" name="Content Placeholder 4">
+            <a:extLst>
+              <a:ext uri="{FF2B5EF4-FFF2-40B4-BE49-F238E27FC236}">
+                <a16:creationId xmlns:a16="http://schemas.microsoft.com/office/drawing/2014/main" id="{64F6F3F8-0D62-4BBB-AD3A-D6A324357DD9}"/>
+              </a:ext>
+            </a:extLst>
+          </p:cNvPr>
+          <p:cNvPicPr>
+            <a:picLocks noGrp="1" noChangeAspect="1"/>
+          </p:cNvPicPr>
+          <p:nvPr>
+            <p:ph idx="1"/>
+          </p:nvPr>
+        </p:nvPicPr>
+        <p:blipFill>
+          <a:blip r:embed="rId2">
+            <a:duotone>
+              <a:prstClr val="black"/>
+              <a:schemeClr val="accent3">
+                <a:tint val="45000"/>
+                <a:satMod val="400000"/>
+              </a:schemeClr>
+            </a:duotone>
+            <a:extLst>
+              <a:ext uri="{28A0092B-C50C-407E-A947-70E740481C1C}">
+                <a14:useLocalDpi xmlns:a14="http://schemas.microsoft.com/office/drawing/2010/main" val="0"/>
+              </a:ext>
+            </a:extLst>
+          </a:blip>
+          <a:stretch>
+            <a:fillRect/>
+          </a:stretch>
+        </p:blipFill>
+        <p:spPr>
+          <a:xfrm>
+            <a:off x="2564489" y="469783"/>
+            <a:ext cx="5436511" cy="5436511"/>
+          </a:xfrm>
+        </p:spPr>
+      </p:pic>
+    </p:spTree>
+    <p:extLst>
+      <p:ext uri="{BB962C8B-B14F-4D97-AF65-F5344CB8AC3E}">
+        <p14:creationId xmlns:p14="http://schemas.microsoft.com/office/powerpoint/2010/main" val="3005326315"/>
+      </p:ext>
+    </p:extLst>
+  </p:cSld>
+  <p:clrMapOvr>
+    <a:masterClrMapping/>
+  </p:clrMapOvr>
+</p:sld>
+</file>
+
 <file path=ppt/theme/theme1.xml><?xml version="1.0" encoding="utf-8"?>
 <a:theme xmlns:a="http://schemas.openxmlformats.org/drawingml/2006/main" name="Office Theme">
   <a:themeElements>

--- a/src/data/images.pptx
+++ b/src/data/images.pptx
@@ -13,6 +13,9 @@
     <p:sldId id="261" r:id="rId7"/>
     <p:sldId id="262" r:id="rId8"/>
     <p:sldId id="263" r:id="rId9"/>
+    <p:sldId id="264" r:id="rId10"/>
+    <p:sldId id="266" r:id="rId11"/>
+    <p:sldId id="265" r:id="rId12"/>
   </p:sldIdLst>
   <p:sldSz cx="12192000" cy="6858000"/>
   <p:notesSz cx="6858000" cy="9144000"/>
@@ -3425,6 +3428,224 @@
 </p:sld>
 </file>
 
+<file path=ppt/slides/slide10.xml><?xml version="1.0" encoding="utf-8"?>
+<p:sld xmlns:a="http://schemas.openxmlformats.org/drawingml/2006/main" xmlns:r="http://schemas.openxmlformats.org/officeDocument/2006/relationships" xmlns:p="http://schemas.openxmlformats.org/presentationml/2006/main">
+  <p:cSld>
+    <p:spTree>
+      <p:nvGrpSpPr>
+        <p:cNvPr id="1" name=""/>
+        <p:cNvGrpSpPr/>
+        <p:nvPr/>
+      </p:nvGrpSpPr>
+      <p:grpSpPr>
+        <a:xfrm>
+          <a:off x="0" y="0"/>
+          <a:ext cx="0" cy="0"/>
+          <a:chOff x="0" y="0"/>
+          <a:chExt cx="0" cy="0"/>
+        </a:xfrm>
+      </p:grpSpPr>
+      <p:sp>
+        <p:nvSpPr>
+          <p:cNvPr id="2" name="Title 1">
+            <a:extLst>
+              <a:ext uri="{FF2B5EF4-FFF2-40B4-BE49-F238E27FC236}">
+                <a16:creationId xmlns:a16="http://schemas.microsoft.com/office/drawing/2014/main" id="{0E110840-F603-4F95-B58F-FF591111CE94}"/>
+              </a:ext>
+            </a:extLst>
+          </p:cNvPr>
+          <p:cNvSpPr>
+            <a:spLocks noGrp="1"/>
+          </p:cNvSpPr>
+          <p:nvPr>
+            <p:ph type="title"/>
+          </p:nvPr>
+        </p:nvSpPr>
+        <p:spPr/>
+        <p:txBody>
+          <a:bodyPr/>
+          <a:lstStyle/>
+          <a:p>
+            <a:endParaRPr lang="en-US"/>
+          </a:p>
+        </p:txBody>
+      </p:sp>
+      <p:sp>
+        <p:nvSpPr>
+          <p:cNvPr id="3" name="Content Placeholder 2">
+            <a:extLst>
+              <a:ext uri="{FF2B5EF4-FFF2-40B4-BE49-F238E27FC236}">
+                <a16:creationId xmlns:a16="http://schemas.microsoft.com/office/drawing/2014/main" id="{A472F9E3-867A-49C4-B478-7EA6C740C9EB}"/>
+              </a:ext>
+            </a:extLst>
+          </p:cNvPr>
+          <p:cNvSpPr>
+            <a:spLocks noGrp="1"/>
+          </p:cNvSpPr>
+          <p:nvPr>
+            <p:ph idx="1"/>
+          </p:nvPr>
+        </p:nvSpPr>
+        <p:spPr/>
+        <p:txBody>
+          <a:bodyPr/>
+          <a:lstStyle/>
+          <a:p>
+            <a:endParaRPr lang="en-US"/>
+          </a:p>
+        </p:txBody>
+      </p:sp>
+      <p:pic>
+        <p:nvPicPr>
+          <p:cNvPr id="4" name="Picture 3">
+            <a:extLst>
+              <a:ext uri="{FF2B5EF4-FFF2-40B4-BE49-F238E27FC236}">
+                <a16:creationId xmlns:a16="http://schemas.microsoft.com/office/drawing/2014/main" id="{68F3E6C2-B2C2-41DE-9F78-7E7E2997F781}"/>
+              </a:ext>
+            </a:extLst>
+          </p:cNvPr>
+          <p:cNvPicPr>
+            <a:picLocks noChangeAspect="1"/>
+          </p:cNvPicPr>
+          <p:nvPr/>
+        </p:nvPicPr>
+        <p:blipFill rotWithShape="1">
+          <a:blip r:embed="rId2"/>
+          <a:srcRect l="949" t="17249" r="1687" b="13394"/>
+          <a:stretch/>
+        </p:blipFill>
+        <p:spPr>
+          <a:xfrm>
+            <a:off x="343949" y="209318"/>
+            <a:ext cx="10727483" cy="6283557"/>
+          </a:xfrm>
+          <a:prstGeom prst="rect">
+            <a:avLst/>
+          </a:prstGeom>
+        </p:spPr>
+      </p:pic>
+    </p:spTree>
+    <p:extLst>
+      <p:ext uri="{BB962C8B-B14F-4D97-AF65-F5344CB8AC3E}">
+        <p14:creationId xmlns:p14="http://schemas.microsoft.com/office/powerpoint/2010/main" val="1712430977"/>
+      </p:ext>
+    </p:extLst>
+  </p:cSld>
+  <p:clrMapOvr>
+    <a:masterClrMapping/>
+  </p:clrMapOvr>
+</p:sld>
+</file>
+
+<file path=ppt/slides/slide11.xml><?xml version="1.0" encoding="utf-8"?>
+<p:sld xmlns:a="http://schemas.openxmlformats.org/drawingml/2006/main" xmlns:r="http://schemas.openxmlformats.org/officeDocument/2006/relationships" xmlns:p="http://schemas.openxmlformats.org/presentationml/2006/main">
+  <p:cSld>
+    <p:spTree>
+      <p:nvGrpSpPr>
+        <p:cNvPr id="1" name=""/>
+        <p:cNvGrpSpPr/>
+        <p:nvPr/>
+      </p:nvGrpSpPr>
+      <p:grpSpPr>
+        <a:xfrm>
+          <a:off x="0" y="0"/>
+          <a:ext cx="0" cy="0"/>
+          <a:chOff x="0" y="0"/>
+          <a:chExt cx="0" cy="0"/>
+        </a:xfrm>
+      </p:grpSpPr>
+      <p:sp>
+        <p:nvSpPr>
+          <p:cNvPr id="2" name="Title 1">
+            <a:extLst>
+              <a:ext uri="{FF2B5EF4-FFF2-40B4-BE49-F238E27FC236}">
+                <a16:creationId xmlns:a16="http://schemas.microsoft.com/office/drawing/2014/main" id="{0BCB046E-2FC3-4408-8943-A295B7B1A566}"/>
+              </a:ext>
+            </a:extLst>
+          </p:cNvPr>
+          <p:cNvSpPr>
+            <a:spLocks noGrp="1"/>
+          </p:cNvSpPr>
+          <p:nvPr>
+            <p:ph type="title"/>
+          </p:nvPr>
+        </p:nvSpPr>
+        <p:spPr/>
+        <p:txBody>
+          <a:bodyPr/>
+          <a:lstStyle/>
+          <a:p>
+            <a:endParaRPr lang="en-US"/>
+          </a:p>
+        </p:txBody>
+      </p:sp>
+      <p:sp>
+        <p:nvSpPr>
+          <p:cNvPr id="3" name="Content Placeholder 2">
+            <a:extLst>
+              <a:ext uri="{FF2B5EF4-FFF2-40B4-BE49-F238E27FC236}">
+                <a16:creationId xmlns:a16="http://schemas.microsoft.com/office/drawing/2014/main" id="{52413933-3B51-4EDA-84AA-EFE19A6C69A1}"/>
+              </a:ext>
+            </a:extLst>
+          </p:cNvPr>
+          <p:cNvSpPr>
+            <a:spLocks noGrp="1"/>
+          </p:cNvSpPr>
+          <p:nvPr>
+            <p:ph idx="1"/>
+          </p:nvPr>
+        </p:nvSpPr>
+        <p:spPr/>
+        <p:txBody>
+          <a:bodyPr/>
+          <a:lstStyle/>
+          <a:p>
+            <a:endParaRPr lang="en-US"/>
+          </a:p>
+        </p:txBody>
+      </p:sp>
+      <p:pic>
+        <p:nvPicPr>
+          <p:cNvPr id="5" name="Picture 4">
+            <a:extLst>
+              <a:ext uri="{FF2B5EF4-FFF2-40B4-BE49-F238E27FC236}">
+                <a16:creationId xmlns:a16="http://schemas.microsoft.com/office/drawing/2014/main" id="{3D3E4785-F443-486F-A3AF-B6CAEAD1408B}"/>
+              </a:ext>
+            </a:extLst>
+          </p:cNvPr>
+          <p:cNvPicPr>
+            <a:picLocks noChangeAspect="1"/>
+          </p:cNvPicPr>
+          <p:nvPr/>
+        </p:nvPicPr>
+        <p:blipFill rotWithShape="1">
+          <a:blip r:embed="rId2"/>
+          <a:srcRect l="32271" t="27039" r="16949" b="5381"/>
+          <a:stretch/>
+        </p:blipFill>
+        <p:spPr>
+          <a:xfrm>
+            <a:off x="1350628" y="365125"/>
+            <a:ext cx="8892331" cy="6410189"/>
+          </a:xfrm>
+          <a:prstGeom prst="rect">
+            <a:avLst/>
+          </a:prstGeom>
+        </p:spPr>
+      </p:pic>
+    </p:spTree>
+    <p:extLst>
+      <p:ext uri="{BB962C8B-B14F-4D97-AF65-F5344CB8AC3E}">
+        <p14:creationId xmlns:p14="http://schemas.microsoft.com/office/powerpoint/2010/main" val="3944916952"/>
+      </p:ext>
+    </p:extLst>
+  </p:cSld>
+  <p:clrMapOvr>
+    <a:masterClrMapping/>
+  </p:clrMapOvr>
+</p:sld>
+</file>
+
 <file path=ppt/slides/slide2.xml><?xml version="1.0" encoding="utf-8"?>
 <p:sld xmlns:a="http://schemas.openxmlformats.org/drawingml/2006/main" xmlns:r="http://schemas.openxmlformats.org/officeDocument/2006/relationships" xmlns:p="http://schemas.openxmlformats.org/presentationml/2006/main">
   <p:cSld>
@@ -3731,8 +3952,37 @@
         </p:blipFill>
         <p:spPr>
           <a:xfrm>
-            <a:off x="621436" y="517"/>
+            <a:off x="621436" y="-83372"/>
             <a:ext cx="10732364" cy="6810918"/>
+          </a:xfrm>
+          <a:prstGeom prst="rect">
+            <a:avLst/>
+          </a:prstGeom>
+        </p:spPr>
+      </p:pic>
+      <p:pic>
+        <p:nvPicPr>
+          <p:cNvPr id="5" name="Picture 4">
+            <a:extLst>
+              <a:ext uri="{FF2B5EF4-FFF2-40B4-BE49-F238E27FC236}">
+                <a16:creationId xmlns:a16="http://schemas.microsoft.com/office/drawing/2014/main" id="{948D58F4-96F9-45AE-B3C9-1E9EACA20525}"/>
+              </a:ext>
+            </a:extLst>
+          </p:cNvPr>
+          <p:cNvPicPr>
+            <a:picLocks noChangeAspect="1"/>
+          </p:cNvPicPr>
+          <p:nvPr/>
+        </p:nvPicPr>
+        <p:blipFill rotWithShape="1">
+          <a:blip r:embed="rId2"/>
+          <a:srcRect l="5097" t="23679" r="34830" b="5941"/>
+          <a:stretch/>
+        </p:blipFill>
+        <p:spPr>
+          <a:xfrm>
+            <a:off x="6186677" y="2139186"/>
+            <a:ext cx="5383887" cy="3416694"/>
           </a:xfrm>
           <a:prstGeom prst="rect">
             <a:avLst/>
@@ -3924,7 +4174,7 @@
           <a:bodyPr/>
           <a:lstStyle/>
           <a:p>
-            <a:endParaRPr lang="en-US"/>
+            <a:endParaRPr lang="en-US" dirty="0"/>
           </a:p>
         </p:txBody>
       </p:sp>
@@ -3949,8 +4199,37 @@
         </p:blipFill>
         <p:spPr>
           <a:xfrm>
-            <a:off x="89603" y="1278384"/>
-            <a:ext cx="11948517" cy="5013612"/>
+            <a:off x="544252" y="365125"/>
+            <a:ext cx="7098037" cy="2978345"/>
+          </a:xfrm>
+          <a:prstGeom prst="rect">
+            <a:avLst/>
+          </a:prstGeom>
+        </p:spPr>
+      </p:pic>
+      <p:pic>
+        <p:nvPicPr>
+          <p:cNvPr id="5" name="Picture 4">
+            <a:extLst>
+              <a:ext uri="{FF2B5EF4-FFF2-40B4-BE49-F238E27FC236}">
+                <a16:creationId xmlns:a16="http://schemas.microsoft.com/office/drawing/2014/main" id="{F7A49FF9-A054-4F1A-83AE-2524738C53DF}"/>
+              </a:ext>
+            </a:extLst>
+          </p:cNvPr>
+          <p:cNvPicPr>
+            <a:picLocks noChangeAspect="1"/>
+          </p:cNvPicPr>
+          <p:nvPr/>
+        </p:nvPicPr>
+        <p:blipFill rotWithShape="1">
+          <a:blip r:embed="rId2"/>
+          <a:srcRect l="50837" t="32835" r="12639" b="14545"/>
+          <a:stretch/>
+        </p:blipFill>
+        <p:spPr>
+          <a:xfrm>
+            <a:off x="3783435" y="1124124"/>
+            <a:ext cx="6769915" cy="5283221"/>
           </a:xfrm>
           <a:prstGeom prst="rect">
             <a:avLst/>
@@ -4167,6 +4446,115 @@
     <p:extLst>
       <p:ext uri="{BB962C8B-B14F-4D97-AF65-F5344CB8AC3E}">
         <p14:creationId xmlns:p14="http://schemas.microsoft.com/office/powerpoint/2010/main" val="3005326315"/>
+      </p:ext>
+    </p:extLst>
+  </p:cSld>
+  <p:clrMapOvr>
+    <a:masterClrMapping/>
+  </p:clrMapOvr>
+</p:sld>
+</file>
+
+<file path=ppt/slides/slide9.xml><?xml version="1.0" encoding="utf-8"?>
+<p:sld xmlns:a="http://schemas.openxmlformats.org/drawingml/2006/main" xmlns:r="http://schemas.openxmlformats.org/officeDocument/2006/relationships" xmlns:p="http://schemas.openxmlformats.org/presentationml/2006/main">
+  <p:cSld>
+    <p:spTree>
+      <p:nvGrpSpPr>
+        <p:cNvPr id="1" name=""/>
+        <p:cNvGrpSpPr/>
+        <p:nvPr/>
+      </p:nvGrpSpPr>
+      <p:grpSpPr>
+        <a:xfrm>
+          <a:off x="0" y="0"/>
+          <a:ext cx="0" cy="0"/>
+          <a:chOff x="0" y="0"/>
+          <a:chExt cx="0" cy="0"/>
+        </a:xfrm>
+      </p:grpSpPr>
+      <p:sp>
+        <p:nvSpPr>
+          <p:cNvPr id="2" name="Title 1">
+            <a:extLst>
+              <a:ext uri="{FF2B5EF4-FFF2-40B4-BE49-F238E27FC236}">
+                <a16:creationId xmlns:a16="http://schemas.microsoft.com/office/drawing/2014/main" id="{0BCB046E-2FC3-4408-8943-A295B7B1A566}"/>
+              </a:ext>
+            </a:extLst>
+          </p:cNvPr>
+          <p:cNvSpPr>
+            <a:spLocks noGrp="1"/>
+          </p:cNvSpPr>
+          <p:nvPr>
+            <p:ph type="title"/>
+          </p:nvPr>
+        </p:nvSpPr>
+        <p:spPr/>
+        <p:txBody>
+          <a:bodyPr/>
+          <a:lstStyle/>
+          <a:p>
+            <a:endParaRPr lang="en-US"/>
+          </a:p>
+        </p:txBody>
+      </p:sp>
+      <p:sp>
+        <p:nvSpPr>
+          <p:cNvPr id="3" name="Content Placeholder 2">
+            <a:extLst>
+              <a:ext uri="{FF2B5EF4-FFF2-40B4-BE49-F238E27FC236}">
+                <a16:creationId xmlns:a16="http://schemas.microsoft.com/office/drawing/2014/main" id="{52413933-3B51-4EDA-84AA-EFE19A6C69A1}"/>
+              </a:ext>
+            </a:extLst>
+          </p:cNvPr>
+          <p:cNvSpPr>
+            <a:spLocks noGrp="1"/>
+          </p:cNvSpPr>
+          <p:nvPr>
+            <p:ph idx="1"/>
+          </p:nvPr>
+        </p:nvSpPr>
+        <p:spPr/>
+        <p:txBody>
+          <a:bodyPr/>
+          <a:lstStyle/>
+          <a:p>
+            <a:endParaRPr lang="en-US"/>
+          </a:p>
+        </p:txBody>
+      </p:sp>
+      <p:pic>
+        <p:nvPicPr>
+          <p:cNvPr id="4" name="Picture 3">
+            <a:extLst>
+              <a:ext uri="{FF2B5EF4-FFF2-40B4-BE49-F238E27FC236}">
+                <a16:creationId xmlns:a16="http://schemas.microsoft.com/office/drawing/2014/main" id="{F03D25FF-643A-4449-A932-485EBBF2A79F}"/>
+              </a:ext>
+            </a:extLst>
+          </p:cNvPr>
+          <p:cNvPicPr>
+            <a:picLocks noChangeAspect="1"/>
+          </p:cNvPicPr>
+          <p:nvPr/>
+        </p:nvPicPr>
+        <p:blipFill rotWithShape="1">
+          <a:blip r:embed="rId2"/>
+          <a:srcRect l="23944" t="12939" r="26239" b="1824"/>
+          <a:stretch/>
+        </p:blipFill>
+        <p:spPr>
+          <a:xfrm>
+            <a:off x="2919368" y="328422"/>
+            <a:ext cx="6778305" cy="6282104"/>
+          </a:xfrm>
+          <a:prstGeom prst="rect">
+            <a:avLst/>
+          </a:prstGeom>
+        </p:spPr>
+      </p:pic>
+    </p:spTree>
+    <p:extLst>
+      <p:ext uri="{BB962C8B-B14F-4D97-AF65-F5344CB8AC3E}">
+        <p14:creationId xmlns:p14="http://schemas.microsoft.com/office/powerpoint/2010/main" val="4023115884"/>
       </p:ext>
     </p:extLst>
   </p:cSld>

--- a/src/data/images.pptx
+++ b/src/data/images.pptx
@@ -6,16 +6,17 @@
   </p:sldMasterIdLst>
   <p:sldIdLst>
     <p:sldId id="256" r:id="rId2"/>
-    <p:sldId id="258" r:id="rId3"/>
-    <p:sldId id="257" r:id="rId4"/>
-    <p:sldId id="259" r:id="rId5"/>
-    <p:sldId id="260" r:id="rId6"/>
-    <p:sldId id="261" r:id="rId7"/>
-    <p:sldId id="262" r:id="rId8"/>
-    <p:sldId id="263" r:id="rId9"/>
-    <p:sldId id="264" r:id="rId10"/>
-    <p:sldId id="266" r:id="rId11"/>
-    <p:sldId id="265" r:id="rId12"/>
+    <p:sldId id="267" r:id="rId3"/>
+    <p:sldId id="258" r:id="rId4"/>
+    <p:sldId id="257" r:id="rId5"/>
+    <p:sldId id="259" r:id="rId6"/>
+    <p:sldId id="260" r:id="rId7"/>
+    <p:sldId id="261" r:id="rId8"/>
+    <p:sldId id="262" r:id="rId9"/>
+    <p:sldId id="263" r:id="rId10"/>
+    <p:sldId id="264" r:id="rId11"/>
+    <p:sldId id="266" r:id="rId12"/>
+    <p:sldId id="265" r:id="rId13"/>
   </p:sldIdLst>
   <p:sldSz cx="12192000" cy="6858000"/>
   <p:notesSz cx="6858000" cy="9144000"/>
@@ -269,7 +270,7 @@
           <a:p>
             <a:fld id="{621A180A-8C38-4DA9-BE14-020F85743E22}" type="datetimeFigureOut">
               <a:rPr lang="en-US" smtClean="0"/>
-              <a:t>4/24/2025</a:t>
+              <a:t>12/28/2025</a:t>
             </a:fld>
             <a:endParaRPr lang="en-US"/>
           </a:p>
@@ -467,7 +468,7 @@
           <a:p>
             <a:fld id="{621A180A-8C38-4DA9-BE14-020F85743E22}" type="datetimeFigureOut">
               <a:rPr lang="en-US" smtClean="0"/>
-              <a:t>4/24/2025</a:t>
+              <a:t>12/28/2025</a:t>
             </a:fld>
             <a:endParaRPr lang="en-US"/>
           </a:p>
@@ -675,7 +676,7 @@
           <a:p>
             <a:fld id="{621A180A-8C38-4DA9-BE14-020F85743E22}" type="datetimeFigureOut">
               <a:rPr lang="en-US" smtClean="0"/>
-              <a:t>4/24/2025</a:t>
+              <a:t>12/28/2025</a:t>
             </a:fld>
             <a:endParaRPr lang="en-US"/>
           </a:p>
@@ -873,7 +874,7 @@
           <a:p>
             <a:fld id="{621A180A-8C38-4DA9-BE14-020F85743E22}" type="datetimeFigureOut">
               <a:rPr lang="en-US" smtClean="0"/>
-              <a:t>4/24/2025</a:t>
+              <a:t>12/28/2025</a:t>
             </a:fld>
             <a:endParaRPr lang="en-US"/>
           </a:p>
@@ -1148,7 +1149,7 @@
           <a:p>
             <a:fld id="{621A180A-8C38-4DA9-BE14-020F85743E22}" type="datetimeFigureOut">
               <a:rPr lang="en-US" smtClean="0"/>
-              <a:t>4/24/2025</a:t>
+              <a:t>12/28/2025</a:t>
             </a:fld>
             <a:endParaRPr lang="en-US"/>
           </a:p>
@@ -1413,7 +1414,7 @@
           <a:p>
             <a:fld id="{621A180A-8C38-4DA9-BE14-020F85743E22}" type="datetimeFigureOut">
               <a:rPr lang="en-US" smtClean="0"/>
-              <a:t>4/24/2025</a:t>
+              <a:t>12/28/2025</a:t>
             </a:fld>
             <a:endParaRPr lang="en-US"/>
           </a:p>
@@ -1825,7 +1826,7 @@
           <a:p>
             <a:fld id="{621A180A-8C38-4DA9-BE14-020F85743E22}" type="datetimeFigureOut">
               <a:rPr lang="en-US" smtClean="0"/>
-              <a:t>4/24/2025</a:t>
+              <a:t>12/28/2025</a:t>
             </a:fld>
             <a:endParaRPr lang="en-US"/>
           </a:p>
@@ -1966,7 +1967,7 @@
           <a:p>
             <a:fld id="{621A180A-8C38-4DA9-BE14-020F85743E22}" type="datetimeFigureOut">
               <a:rPr lang="en-US" smtClean="0"/>
-              <a:t>4/24/2025</a:t>
+              <a:t>12/28/2025</a:t>
             </a:fld>
             <a:endParaRPr lang="en-US"/>
           </a:p>
@@ -2079,7 +2080,7 @@
           <a:p>
             <a:fld id="{621A180A-8C38-4DA9-BE14-020F85743E22}" type="datetimeFigureOut">
               <a:rPr lang="en-US" smtClean="0"/>
-              <a:t>4/24/2025</a:t>
+              <a:t>12/28/2025</a:t>
             </a:fld>
             <a:endParaRPr lang="en-US"/>
           </a:p>
@@ -2390,7 +2391,7 @@
           <a:p>
             <a:fld id="{621A180A-8C38-4DA9-BE14-020F85743E22}" type="datetimeFigureOut">
               <a:rPr lang="en-US" smtClean="0"/>
-              <a:t>4/24/2025</a:t>
+              <a:t>12/28/2025</a:t>
             </a:fld>
             <a:endParaRPr lang="en-US"/>
           </a:p>
@@ -2678,7 +2679,7 @@
           <a:p>
             <a:fld id="{621A180A-8C38-4DA9-BE14-020F85743E22}" type="datetimeFigureOut">
               <a:rPr lang="en-US" smtClean="0"/>
-              <a:t>4/24/2025</a:t>
+              <a:t>12/28/2025</a:t>
             </a:fld>
             <a:endParaRPr lang="en-US"/>
           </a:p>
@@ -2919,7 +2920,7 @@
           <a:p>
             <a:fld id="{621A180A-8C38-4DA9-BE14-020F85743E22}" type="datetimeFigureOut">
               <a:rPr lang="en-US" smtClean="0"/>
-              <a:t>4/24/2025</a:t>
+              <a:t>12/28/2025</a:t>
             </a:fld>
             <a:endParaRPr lang="en-US"/>
           </a:p>
@@ -3450,6 +3451,115 @@
           <p:cNvPr id="2" name="Title 1">
             <a:extLst>
               <a:ext uri="{FF2B5EF4-FFF2-40B4-BE49-F238E27FC236}">
+                <a16:creationId xmlns:a16="http://schemas.microsoft.com/office/drawing/2014/main" id="{0BCB046E-2FC3-4408-8943-A295B7B1A566}"/>
+              </a:ext>
+            </a:extLst>
+          </p:cNvPr>
+          <p:cNvSpPr>
+            <a:spLocks noGrp="1"/>
+          </p:cNvSpPr>
+          <p:nvPr>
+            <p:ph type="title"/>
+          </p:nvPr>
+        </p:nvSpPr>
+        <p:spPr/>
+        <p:txBody>
+          <a:bodyPr/>
+          <a:lstStyle/>
+          <a:p>
+            <a:endParaRPr lang="en-US"/>
+          </a:p>
+        </p:txBody>
+      </p:sp>
+      <p:sp>
+        <p:nvSpPr>
+          <p:cNvPr id="3" name="Content Placeholder 2">
+            <a:extLst>
+              <a:ext uri="{FF2B5EF4-FFF2-40B4-BE49-F238E27FC236}">
+                <a16:creationId xmlns:a16="http://schemas.microsoft.com/office/drawing/2014/main" id="{52413933-3B51-4EDA-84AA-EFE19A6C69A1}"/>
+              </a:ext>
+            </a:extLst>
+          </p:cNvPr>
+          <p:cNvSpPr>
+            <a:spLocks noGrp="1"/>
+          </p:cNvSpPr>
+          <p:nvPr>
+            <p:ph idx="1"/>
+          </p:nvPr>
+        </p:nvSpPr>
+        <p:spPr/>
+        <p:txBody>
+          <a:bodyPr/>
+          <a:lstStyle/>
+          <a:p>
+            <a:endParaRPr lang="en-US"/>
+          </a:p>
+        </p:txBody>
+      </p:sp>
+      <p:pic>
+        <p:nvPicPr>
+          <p:cNvPr id="4" name="Picture 3">
+            <a:extLst>
+              <a:ext uri="{FF2B5EF4-FFF2-40B4-BE49-F238E27FC236}">
+                <a16:creationId xmlns:a16="http://schemas.microsoft.com/office/drawing/2014/main" id="{F03D25FF-643A-4449-A932-485EBBF2A79F}"/>
+              </a:ext>
+            </a:extLst>
+          </p:cNvPr>
+          <p:cNvPicPr>
+            <a:picLocks noChangeAspect="1"/>
+          </p:cNvPicPr>
+          <p:nvPr/>
+        </p:nvPicPr>
+        <p:blipFill rotWithShape="1">
+          <a:blip r:embed="rId2"/>
+          <a:srcRect l="23944" t="12939" r="26239" b="1824"/>
+          <a:stretch/>
+        </p:blipFill>
+        <p:spPr>
+          <a:xfrm>
+            <a:off x="2919368" y="328422"/>
+            <a:ext cx="6778305" cy="6282104"/>
+          </a:xfrm>
+          <a:prstGeom prst="rect">
+            <a:avLst/>
+          </a:prstGeom>
+        </p:spPr>
+      </p:pic>
+    </p:spTree>
+    <p:extLst>
+      <p:ext uri="{BB962C8B-B14F-4D97-AF65-F5344CB8AC3E}">
+        <p14:creationId xmlns:p14="http://schemas.microsoft.com/office/powerpoint/2010/main" val="4023115884"/>
+      </p:ext>
+    </p:extLst>
+  </p:cSld>
+  <p:clrMapOvr>
+    <a:masterClrMapping/>
+  </p:clrMapOvr>
+</p:sld>
+</file>
+
+<file path=ppt/slides/slide11.xml><?xml version="1.0" encoding="utf-8"?>
+<p:sld xmlns:a="http://schemas.openxmlformats.org/drawingml/2006/main" xmlns:r="http://schemas.openxmlformats.org/officeDocument/2006/relationships" xmlns:p="http://schemas.openxmlformats.org/presentationml/2006/main">
+  <p:cSld>
+    <p:spTree>
+      <p:nvGrpSpPr>
+        <p:cNvPr id="1" name=""/>
+        <p:cNvGrpSpPr/>
+        <p:nvPr/>
+      </p:nvGrpSpPr>
+      <p:grpSpPr>
+        <a:xfrm>
+          <a:off x="0" y="0"/>
+          <a:ext cx="0" cy="0"/>
+          <a:chOff x="0" y="0"/>
+          <a:chExt cx="0" cy="0"/>
+        </a:xfrm>
+      </p:grpSpPr>
+      <p:sp>
+        <p:nvSpPr>
+          <p:cNvPr id="2" name="Title 1">
+            <a:extLst>
+              <a:ext uri="{FF2B5EF4-FFF2-40B4-BE49-F238E27FC236}">
                 <a16:creationId xmlns:a16="http://schemas.microsoft.com/office/drawing/2014/main" id="{0E110840-F603-4F95-B58F-FF591111CE94}"/>
               </a:ext>
             </a:extLst>
@@ -3537,7 +3647,7 @@
 </p:sld>
 </file>
 
-<file path=ppt/slides/slide11.xml><?xml version="1.0" encoding="utf-8"?>
+<file path=ppt/slides/slide12.xml><?xml version="1.0" encoding="utf-8"?>
 <p:sld xmlns:a="http://schemas.openxmlformats.org/drawingml/2006/main" xmlns:r="http://schemas.openxmlformats.org/officeDocument/2006/relationships" xmlns:p="http://schemas.openxmlformats.org/presentationml/2006/main">
   <p:cSld>
     <p:spTree>
@@ -3668,6 +3778,115 @@
           <p:cNvPr id="2" name="Title 1">
             <a:extLst>
               <a:ext uri="{FF2B5EF4-FFF2-40B4-BE49-F238E27FC236}">
+                <a16:creationId xmlns:a16="http://schemas.microsoft.com/office/drawing/2014/main" id="{6DEE0325-4677-45F6-98A3-2F16B7616720}"/>
+              </a:ext>
+            </a:extLst>
+          </p:cNvPr>
+          <p:cNvSpPr>
+            <a:spLocks noGrp="1"/>
+          </p:cNvSpPr>
+          <p:nvPr>
+            <p:ph type="title"/>
+          </p:nvPr>
+        </p:nvSpPr>
+        <p:spPr/>
+        <p:txBody>
+          <a:bodyPr/>
+          <a:lstStyle/>
+          <a:p>
+            <a:endParaRPr lang="en-US"/>
+          </a:p>
+        </p:txBody>
+      </p:sp>
+      <p:sp>
+        <p:nvSpPr>
+          <p:cNvPr id="3" name="Content Placeholder 2">
+            <a:extLst>
+              <a:ext uri="{FF2B5EF4-FFF2-40B4-BE49-F238E27FC236}">
+                <a16:creationId xmlns:a16="http://schemas.microsoft.com/office/drawing/2014/main" id="{DBFA8D24-B44B-4E7C-9438-C6FF40392FB0}"/>
+              </a:ext>
+            </a:extLst>
+          </p:cNvPr>
+          <p:cNvSpPr>
+            <a:spLocks noGrp="1"/>
+          </p:cNvSpPr>
+          <p:nvPr>
+            <p:ph idx="1"/>
+          </p:nvPr>
+        </p:nvSpPr>
+        <p:spPr/>
+        <p:txBody>
+          <a:bodyPr/>
+          <a:lstStyle/>
+          <a:p>
+            <a:endParaRPr lang="en-US"/>
+          </a:p>
+        </p:txBody>
+      </p:sp>
+      <p:pic>
+        <p:nvPicPr>
+          <p:cNvPr id="4" name="Picture 3">
+            <a:extLst>
+              <a:ext uri="{FF2B5EF4-FFF2-40B4-BE49-F238E27FC236}">
+                <a16:creationId xmlns:a16="http://schemas.microsoft.com/office/drawing/2014/main" id="{0223FFFF-0E75-4205-BBFF-7A86C8F31AAB}"/>
+              </a:ext>
+            </a:extLst>
+          </p:cNvPr>
+          <p:cNvPicPr>
+            <a:picLocks noChangeAspect="1"/>
+          </p:cNvPicPr>
+          <p:nvPr/>
+        </p:nvPicPr>
+        <p:blipFill rotWithShape="1">
+          <a:blip r:embed="rId2"/>
+          <a:srcRect l="25026" t="21980" r="25394" b="12131"/>
+          <a:stretch/>
+        </p:blipFill>
+        <p:spPr>
+          <a:xfrm>
+            <a:off x="1072308" y="233625"/>
+            <a:ext cx="9197848" cy="6621200"/>
+          </a:xfrm>
+          <a:prstGeom prst="rect">
+            <a:avLst/>
+          </a:prstGeom>
+        </p:spPr>
+      </p:pic>
+    </p:spTree>
+    <p:extLst>
+      <p:ext uri="{BB962C8B-B14F-4D97-AF65-F5344CB8AC3E}">
+        <p14:creationId xmlns:p14="http://schemas.microsoft.com/office/powerpoint/2010/main" val="2561320263"/>
+      </p:ext>
+    </p:extLst>
+  </p:cSld>
+  <p:clrMapOvr>
+    <a:masterClrMapping/>
+  </p:clrMapOvr>
+</p:sld>
+</file>
+
+<file path=ppt/slides/slide3.xml><?xml version="1.0" encoding="utf-8"?>
+<p:sld xmlns:a="http://schemas.openxmlformats.org/drawingml/2006/main" xmlns:r="http://schemas.openxmlformats.org/officeDocument/2006/relationships" xmlns:p="http://schemas.openxmlformats.org/presentationml/2006/main">
+  <p:cSld>
+    <p:spTree>
+      <p:nvGrpSpPr>
+        <p:cNvPr id="1" name=""/>
+        <p:cNvGrpSpPr/>
+        <p:nvPr/>
+      </p:nvGrpSpPr>
+      <p:grpSpPr>
+        <a:xfrm>
+          <a:off x="0" y="0"/>
+          <a:ext cx="0" cy="0"/>
+          <a:chOff x="0" y="0"/>
+          <a:chExt cx="0" cy="0"/>
+        </a:xfrm>
+      </p:grpSpPr>
+      <p:sp>
+        <p:nvSpPr>
+          <p:cNvPr id="2" name="Title 1">
+            <a:extLst>
+              <a:ext uri="{FF2B5EF4-FFF2-40B4-BE49-F238E27FC236}">
                 <a16:creationId xmlns:a16="http://schemas.microsoft.com/office/drawing/2014/main" id="{C4FE007A-EC36-372B-8420-EA8B27053235}"/>
               </a:ext>
             </a:extLst>
@@ -3755,7 +3974,7 @@
 </p:sld>
 </file>
 
-<file path=ppt/slides/slide3.xml><?xml version="1.0" encoding="utf-8"?>
+<file path=ppt/slides/slide4.xml><?xml version="1.0" encoding="utf-8"?>
 <p:sld xmlns:a="http://schemas.openxmlformats.org/drawingml/2006/main" xmlns:r="http://schemas.openxmlformats.org/officeDocument/2006/relationships" xmlns:p="http://schemas.openxmlformats.org/presentationml/2006/main">
   <p:cSld>
     <p:spTree>
@@ -3864,7 +4083,7 @@
 </p:sld>
 </file>
 
-<file path=ppt/slides/slide4.xml><?xml version="1.0" encoding="utf-8"?>
+<file path=ppt/slides/slide5.xml><?xml version="1.0" encoding="utf-8"?>
 <p:sld xmlns:a="http://schemas.openxmlformats.org/drawingml/2006/main" xmlns:r="http://schemas.openxmlformats.org/officeDocument/2006/relationships" xmlns:p="http://schemas.openxmlformats.org/presentationml/2006/main">
   <p:cSld>
     <p:spTree>
@@ -4002,7 +4221,7 @@
 </p:sld>
 </file>
 
-<file path=ppt/slides/slide5.xml><?xml version="1.0" encoding="utf-8"?>
+<file path=ppt/slides/slide6.xml><?xml version="1.0" encoding="utf-8"?>
 <p:sld xmlns:a="http://schemas.openxmlformats.org/drawingml/2006/main" xmlns:r="http://schemas.openxmlformats.org/officeDocument/2006/relationships" xmlns:p="http://schemas.openxmlformats.org/presentationml/2006/main">
   <p:cSld>
     <p:spTree>
@@ -4111,7 +4330,7 @@
 </p:sld>
 </file>
 
-<file path=ppt/slides/slide6.xml><?xml version="1.0" encoding="utf-8"?>
+<file path=ppt/slides/slide7.xml><?xml version="1.0" encoding="utf-8"?>
 <p:sld xmlns:a="http://schemas.openxmlformats.org/drawingml/2006/main" xmlns:r="http://schemas.openxmlformats.org/officeDocument/2006/relationships" xmlns:p="http://schemas.openxmlformats.org/presentationml/2006/main">
   <p:cSld>
     <p:spTree>
@@ -4249,7 +4468,7 @@
 </p:sld>
 </file>
 
-<file path=ppt/slides/slide7.xml><?xml version="1.0" encoding="utf-8"?>
+<file path=ppt/slides/slide8.xml><?xml version="1.0" encoding="utf-8"?>
 <p:sld xmlns:a="http://schemas.openxmlformats.org/drawingml/2006/main" xmlns:r="http://schemas.openxmlformats.org/officeDocument/2006/relationships" xmlns:p="http://schemas.openxmlformats.org/presentationml/2006/main">
   <p:cSld>
     <p:spTree>
@@ -4358,103 +4577,6 @@
 </p:sld>
 </file>
 
-<file path=ppt/slides/slide8.xml><?xml version="1.0" encoding="utf-8"?>
-<p:sld xmlns:a="http://schemas.openxmlformats.org/drawingml/2006/main" xmlns:r="http://schemas.openxmlformats.org/officeDocument/2006/relationships" xmlns:p="http://schemas.openxmlformats.org/presentationml/2006/main">
-  <p:cSld>
-    <p:spTree>
-      <p:nvGrpSpPr>
-        <p:cNvPr id="1" name=""/>
-        <p:cNvGrpSpPr/>
-        <p:nvPr/>
-      </p:nvGrpSpPr>
-      <p:grpSpPr>
-        <a:xfrm>
-          <a:off x="0" y="0"/>
-          <a:ext cx="0" cy="0"/>
-          <a:chOff x="0" y="0"/>
-          <a:chExt cx="0" cy="0"/>
-        </a:xfrm>
-      </p:grpSpPr>
-      <p:sp>
-        <p:nvSpPr>
-          <p:cNvPr id="2" name="Title 1">
-            <a:extLst>
-              <a:ext uri="{FF2B5EF4-FFF2-40B4-BE49-F238E27FC236}">
-                <a16:creationId xmlns:a16="http://schemas.microsoft.com/office/drawing/2014/main" id="{6F25426D-49CE-4866-992B-BD5EE93A10DA}"/>
-              </a:ext>
-            </a:extLst>
-          </p:cNvPr>
-          <p:cNvSpPr>
-            <a:spLocks noGrp="1"/>
-          </p:cNvSpPr>
-          <p:nvPr>
-            <p:ph type="title"/>
-          </p:nvPr>
-        </p:nvSpPr>
-        <p:spPr/>
-        <p:txBody>
-          <a:bodyPr/>
-          <a:lstStyle/>
-          <a:p>
-            <a:endParaRPr lang="en-US"/>
-          </a:p>
-        </p:txBody>
-      </p:sp>
-      <p:pic>
-        <p:nvPicPr>
-          <p:cNvPr id="5" name="Content Placeholder 4">
-            <a:extLst>
-              <a:ext uri="{FF2B5EF4-FFF2-40B4-BE49-F238E27FC236}">
-                <a16:creationId xmlns:a16="http://schemas.microsoft.com/office/drawing/2014/main" id="{64F6F3F8-0D62-4BBB-AD3A-D6A324357DD9}"/>
-              </a:ext>
-            </a:extLst>
-          </p:cNvPr>
-          <p:cNvPicPr>
-            <a:picLocks noGrp="1" noChangeAspect="1"/>
-          </p:cNvPicPr>
-          <p:nvPr>
-            <p:ph idx="1"/>
-          </p:nvPr>
-        </p:nvPicPr>
-        <p:blipFill>
-          <a:blip r:embed="rId2">
-            <a:duotone>
-              <a:prstClr val="black"/>
-              <a:schemeClr val="accent3">
-                <a:tint val="45000"/>
-                <a:satMod val="400000"/>
-              </a:schemeClr>
-            </a:duotone>
-            <a:extLst>
-              <a:ext uri="{28A0092B-C50C-407E-A947-70E740481C1C}">
-                <a14:useLocalDpi xmlns:a14="http://schemas.microsoft.com/office/drawing/2010/main" val="0"/>
-              </a:ext>
-            </a:extLst>
-          </a:blip>
-          <a:stretch>
-            <a:fillRect/>
-          </a:stretch>
-        </p:blipFill>
-        <p:spPr>
-          <a:xfrm>
-            <a:off x="2564489" y="469783"/>
-            <a:ext cx="5436511" cy="5436511"/>
-          </a:xfrm>
-        </p:spPr>
-      </p:pic>
-    </p:spTree>
-    <p:extLst>
-      <p:ext uri="{BB962C8B-B14F-4D97-AF65-F5344CB8AC3E}">
-        <p14:creationId xmlns:p14="http://schemas.microsoft.com/office/powerpoint/2010/main" val="3005326315"/>
-      </p:ext>
-    </p:extLst>
-  </p:cSld>
-  <p:clrMapOvr>
-    <a:masterClrMapping/>
-  </p:clrMapOvr>
-</p:sld>
-</file>
-
 <file path=ppt/slides/slide9.xml><?xml version="1.0" encoding="utf-8"?>
 <p:sld xmlns:a="http://schemas.openxmlformats.org/drawingml/2006/main" xmlns:r="http://schemas.openxmlformats.org/officeDocument/2006/relationships" xmlns:p="http://schemas.openxmlformats.org/presentationml/2006/main">
   <p:cSld>
@@ -4477,7 +4599,7 @@
           <p:cNvPr id="2" name="Title 1">
             <a:extLst>
               <a:ext uri="{FF2B5EF4-FFF2-40B4-BE49-F238E27FC236}">
-                <a16:creationId xmlns:a16="http://schemas.microsoft.com/office/drawing/2014/main" id="{0BCB046E-2FC3-4408-8943-A295B7B1A566}"/>
+                <a16:creationId xmlns:a16="http://schemas.microsoft.com/office/drawing/2014/main" id="{6F25426D-49CE-4866-992B-BD5EE93A10DA}"/>
               </a:ext>
             </a:extLst>
           </p:cNvPr>
@@ -4486,31 +4608,6 @@
           </p:cNvSpPr>
           <p:nvPr>
             <p:ph type="title"/>
-          </p:nvPr>
-        </p:nvSpPr>
-        <p:spPr/>
-        <p:txBody>
-          <a:bodyPr/>
-          <a:lstStyle/>
-          <a:p>
-            <a:endParaRPr lang="en-US"/>
-          </a:p>
-        </p:txBody>
-      </p:sp>
-      <p:sp>
-        <p:nvSpPr>
-          <p:cNvPr id="3" name="Content Placeholder 2">
-            <a:extLst>
-              <a:ext uri="{FF2B5EF4-FFF2-40B4-BE49-F238E27FC236}">
-                <a16:creationId xmlns:a16="http://schemas.microsoft.com/office/drawing/2014/main" id="{52413933-3B51-4EDA-84AA-EFE19A6C69A1}"/>
-              </a:ext>
-            </a:extLst>
-          </p:cNvPr>
-          <p:cNvSpPr>
-            <a:spLocks noGrp="1"/>
-          </p:cNvSpPr>
-          <p:nvPr>
-            <p:ph idx="1"/>
           </p:nvPr>
         </p:nvSpPr>
         <p:spPr/>
@@ -4524,37 +4621,50 @@
       </p:sp>
       <p:pic>
         <p:nvPicPr>
-          <p:cNvPr id="4" name="Picture 3">
-            <a:extLst>
-              <a:ext uri="{FF2B5EF4-FFF2-40B4-BE49-F238E27FC236}">
-                <a16:creationId xmlns:a16="http://schemas.microsoft.com/office/drawing/2014/main" id="{F03D25FF-643A-4449-A932-485EBBF2A79F}"/>
+          <p:cNvPr id="5" name="Content Placeholder 4">
+            <a:extLst>
+              <a:ext uri="{FF2B5EF4-FFF2-40B4-BE49-F238E27FC236}">
+                <a16:creationId xmlns:a16="http://schemas.microsoft.com/office/drawing/2014/main" id="{64F6F3F8-0D62-4BBB-AD3A-D6A324357DD9}"/>
               </a:ext>
             </a:extLst>
           </p:cNvPr>
           <p:cNvPicPr>
-            <a:picLocks noChangeAspect="1"/>
+            <a:picLocks noGrp="1" noChangeAspect="1"/>
           </p:cNvPicPr>
-          <p:nvPr/>
+          <p:nvPr>
+            <p:ph idx="1"/>
+          </p:nvPr>
         </p:nvPicPr>
-        <p:blipFill rotWithShape="1">
-          <a:blip r:embed="rId2"/>
-          <a:srcRect l="23944" t="12939" r="26239" b="1824"/>
-          <a:stretch/>
+        <p:blipFill>
+          <a:blip r:embed="rId2">
+            <a:duotone>
+              <a:prstClr val="black"/>
+              <a:schemeClr val="accent3">
+                <a:tint val="45000"/>
+                <a:satMod val="400000"/>
+              </a:schemeClr>
+            </a:duotone>
+            <a:extLst>
+              <a:ext uri="{28A0092B-C50C-407E-A947-70E740481C1C}">
+                <a14:useLocalDpi xmlns:a14="http://schemas.microsoft.com/office/drawing/2010/main" val="0"/>
+              </a:ext>
+            </a:extLst>
+          </a:blip>
+          <a:stretch>
+            <a:fillRect/>
+          </a:stretch>
         </p:blipFill>
         <p:spPr>
           <a:xfrm>
-            <a:off x="2919368" y="328422"/>
-            <a:ext cx="6778305" cy="6282104"/>
+            <a:off x="2564489" y="469783"/>
+            <a:ext cx="5436511" cy="5436511"/>
           </a:xfrm>
-          <a:prstGeom prst="rect">
-            <a:avLst/>
-          </a:prstGeom>
         </p:spPr>
       </p:pic>
     </p:spTree>
     <p:extLst>
       <p:ext uri="{BB962C8B-B14F-4D97-AF65-F5344CB8AC3E}">
-        <p14:creationId xmlns:p14="http://schemas.microsoft.com/office/powerpoint/2010/main" val="4023115884"/>
+        <p14:creationId xmlns:p14="http://schemas.microsoft.com/office/powerpoint/2010/main" val="3005326315"/>
       </p:ext>
     </p:extLst>
   </p:cSld>

--- a/src/data/images.pptx
+++ b/src/data/images.pptx
@@ -6,17 +6,18 @@
   </p:sldMasterIdLst>
   <p:sldIdLst>
     <p:sldId id="256" r:id="rId2"/>
-    <p:sldId id="267" r:id="rId3"/>
-    <p:sldId id="258" r:id="rId4"/>
-    <p:sldId id="257" r:id="rId5"/>
-    <p:sldId id="259" r:id="rId6"/>
-    <p:sldId id="260" r:id="rId7"/>
-    <p:sldId id="261" r:id="rId8"/>
-    <p:sldId id="262" r:id="rId9"/>
-    <p:sldId id="263" r:id="rId10"/>
-    <p:sldId id="264" r:id="rId11"/>
-    <p:sldId id="266" r:id="rId12"/>
-    <p:sldId id="265" r:id="rId13"/>
+    <p:sldId id="268" r:id="rId3"/>
+    <p:sldId id="267" r:id="rId4"/>
+    <p:sldId id="258" r:id="rId5"/>
+    <p:sldId id="257" r:id="rId6"/>
+    <p:sldId id="259" r:id="rId7"/>
+    <p:sldId id="260" r:id="rId8"/>
+    <p:sldId id="261" r:id="rId9"/>
+    <p:sldId id="262" r:id="rId10"/>
+    <p:sldId id="263" r:id="rId11"/>
+    <p:sldId id="264" r:id="rId12"/>
+    <p:sldId id="266" r:id="rId13"/>
+    <p:sldId id="265" r:id="rId14"/>
   </p:sldIdLst>
   <p:sldSz cx="12192000" cy="6858000"/>
   <p:notesSz cx="6858000" cy="9144000"/>
@@ -270,7 +271,7 @@
           <a:p>
             <a:fld id="{621A180A-8C38-4DA9-BE14-020F85743E22}" type="datetimeFigureOut">
               <a:rPr lang="en-US" smtClean="0"/>
-              <a:t>12/28/2025</a:t>
+              <a:t>1/3/2026</a:t>
             </a:fld>
             <a:endParaRPr lang="en-US"/>
           </a:p>
@@ -468,7 +469,7 @@
           <a:p>
             <a:fld id="{621A180A-8C38-4DA9-BE14-020F85743E22}" type="datetimeFigureOut">
               <a:rPr lang="en-US" smtClean="0"/>
-              <a:t>12/28/2025</a:t>
+              <a:t>1/3/2026</a:t>
             </a:fld>
             <a:endParaRPr lang="en-US"/>
           </a:p>
@@ -676,7 +677,7 @@
           <a:p>
             <a:fld id="{621A180A-8C38-4DA9-BE14-020F85743E22}" type="datetimeFigureOut">
               <a:rPr lang="en-US" smtClean="0"/>
-              <a:t>12/28/2025</a:t>
+              <a:t>1/3/2026</a:t>
             </a:fld>
             <a:endParaRPr lang="en-US"/>
           </a:p>
@@ -874,7 +875,7 @@
           <a:p>
             <a:fld id="{621A180A-8C38-4DA9-BE14-020F85743E22}" type="datetimeFigureOut">
               <a:rPr lang="en-US" smtClean="0"/>
-              <a:t>12/28/2025</a:t>
+              <a:t>1/3/2026</a:t>
             </a:fld>
             <a:endParaRPr lang="en-US"/>
           </a:p>
@@ -1149,7 +1150,7 @@
           <a:p>
             <a:fld id="{621A180A-8C38-4DA9-BE14-020F85743E22}" type="datetimeFigureOut">
               <a:rPr lang="en-US" smtClean="0"/>
-              <a:t>12/28/2025</a:t>
+              <a:t>1/3/2026</a:t>
             </a:fld>
             <a:endParaRPr lang="en-US"/>
           </a:p>
@@ -1414,7 +1415,7 @@
           <a:p>
             <a:fld id="{621A180A-8C38-4DA9-BE14-020F85743E22}" type="datetimeFigureOut">
               <a:rPr lang="en-US" smtClean="0"/>
-              <a:t>12/28/2025</a:t>
+              <a:t>1/3/2026</a:t>
             </a:fld>
             <a:endParaRPr lang="en-US"/>
           </a:p>
@@ -1826,7 +1827,7 @@
           <a:p>
             <a:fld id="{621A180A-8C38-4DA9-BE14-020F85743E22}" type="datetimeFigureOut">
               <a:rPr lang="en-US" smtClean="0"/>
-              <a:t>12/28/2025</a:t>
+              <a:t>1/3/2026</a:t>
             </a:fld>
             <a:endParaRPr lang="en-US"/>
           </a:p>
@@ -1967,7 +1968,7 @@
           <a:p>
             <a:fld id="{621A180A-8C38-4DA9-BE14-020F85743E22}" type="datetimeFigureOut">
               <a:rPr lang="en-US" smtClean="0"/>
-              <a:t>12/28/2025</a:t>
+              <a:t>1/3/2026</a:t>
             </a:fld>
             <a:endParaRPr lang="en-US"/>
           </a:p>
@@ -2080,7 +2081,7 @@
           <a:p>
             <a:fld id="{621A180A-8C38-4DA9-BE14-020F85743E22}" type="datetimeFigureOut">
               <a:rPr lang="en-US" smtClean="0"/>
-              <a:t>12/28/2025</a:t>
+              <a:t>1/3/2026</a:t>
             </a:fld>
             <a:endParaRPr lang="en-US"/>
           </a:p>
@@ -2391,7 +2392,7 @@
           <a:p>
             <a:fld id="{621A180A-8C38-4DA9-BE14-020F85743E22}" type="datetimeFigureOut">
               <a:rPr lang="en-US" smtClean="0"/>
-              <a:t>12/28/2025</a:t>
+              <a:t>1/3/2026</a:t>
             </a:fld>
             <a:endParaRPr lang="en-US"/>
           </a:p>
@@ -2679,7 +2680,7 @@
           <a:p>
             <a:fld id="{621A180A-8C38-4DA9-BE14-020F85743E22}" type="datetimeFigureOut">
               <a:rPr lang="en-US" smtClean="0"/>
-              <a:t>12/28/2025</a:t>
+              <a:t>1/3/2026</a:t>
             </a:fld>
             <a:endParaRPr lang="en-US"/>
           </a:p>
@@ -2920,7 +2921,7 @@
           <a:p>
             <a:fld id="{621A180A-8C38-4DA9-BE14-020F85743E22}" type="datetimeFigureOut">
               <a:rPr lang="en-US" smtClean="0"/>
-              <a:t>12/28/2025</a:t>
+              <a:t>1/3/2026</a:t>
             </a:fld>
             <a:endParaRPr lang="en-US"/>
           </a:p>
@@ -3451,6 +3452,103 @@
           <p:cNvPr id="2" name="Title 1">
             <a:extLst>
               <a:ext uri="{FF2B5EF4-FFF2-40B4-BE49-F238E27FC236}">
+                <a16:creationId xmlns:a16="http://schemas.microsoft.com/office/drawing/2014/main" id="{6F25426D-49CE-4866-992B-BD5EE93A10DA}"/>
+              </a:ext>
+            </a:extLst>
+          </p:cNvPr>
+          <p:cNvSpPr>
+            <a:spLocks noGrp="1"/>
+          </p:cNvSpPr>
+          <p:nvPr>
+            <p:ph type="title"/>
+          </p:nvPr>
+        </p:nvSpPr>
+        <p:spPr/>
+        <p:txBody>
+          <a:bodyPr/>
+          <a:lstStyle/>
+          <a:p>
+            <a:endParaRPr lang="en-US"/>
+          </a:p>
+        </p:txBody>
+      </p:sp>
+      <p:pic>
+        <p:nvPicPr>
+          <p:cNvPr id="5" name="Content Placeholder 4">
+            <a:extLst>
+              <a:ext uri="{FF2B5EF4-FFF2-40B4-BE49-F238E27FC236}">
+                <a16:creationId xmlns:a16="http://schemas.microsoft.com/office/drawing/2014/main" id="{64F6F3F8-0D62-4BBB-AD3A-D6A324357DD9}"/>
+              </a:ext>
+            </a:extLst>
+          </p:cNvPr>
+          <p:cNvPicPr>
+            <a:picLocks noGrp="1" noChangeAspect="1"/>
+          </p:cNvPicPr>
+          <p:nvPr>
+            <p:ph idx="1"/>
+          </p:nvPr>
+        </p:nvPicPr>
+        <p:blipFill>
+          <a:blip r:embed="rId2">
+            <a:duotone>
+              <a:prstClr val="black"/>
+              <a:schemeClr val="accent3">
+                <a:tint val="45000"/>
+                <a:satMod val="400000"/>
+              </a:schemeClr>
+            </a:duotone>
+            <a:extLst>
+              <a:ext uri="{28A0092B-C50C-407E-A947-70E740481C1C}">
+                <a14:useLocalDpi xmlns:a14="http://schemas.microsoft.com/office/drawing/2010/main" val="0"/>
+              </a:ext>
+            </a:extLst>
+          </a:blip>
+          <a:stretch>
+            <a:fillRect/>
+          </a:stretch>
+        </p:blipFill>
+        <p:spPr>
+          <a:xfrm>
+            <a:off x="2564489" y="469783"/>
+            <a:ext cx="5436511" cy="5436511"/>
+          </a:xfrm>
+        </p:spPr>
+      </p:pic>
+    </p:spTree>
+    <p:extLst>
+      <p:ext uri="{BB962C8B-B14F-4D97-AF65-F5344CB8AC3E}">
+        <p14:creationId xmlns:p14="http://schemas.microsoft.com/office/powerpoint/2010/main" val="3005326315"/>
+      </p:ext>
+    </p:extLst>
+  </p:cSld>
+  <p:clrMapOvr>
+    <a:masterClrMapping/>
+  </p:clrMapOvr>
+</p:sld>
+</file>
+
+<file path=ppt/slides/slide11.xml><?xml version="1.0" encoding="utf-8"?>
+<p:sld xmlns:a="http://schemas.openxmlformats.org/drawingml/2006/main" xmlns:r="http://schemas.openxmlformats.org/officeDocument/2006/relationships" xmlns:p="http://schemas.openxmlformats.org/presentationml/2006/main">
+  <p:cSld>
+    <p:spTree>
+      <p:nvGrpSpPr>
+        <p:cNvPr id="1" name=""/>
+        <p:cNvGrpSpPr/>
+        <p:nvPr/>
+      </p:nvGrpSpPr>
+      <p:grpSpPr>
+        <a:xfrm>
+          <a:off x="0" y="0"/>
+          <a:ext cx="0" cy="0"/>
+          <a:chOff x="0" y="0"/>
+          <a:chExt cx="0" cy="0"/>
+        </a:xfrm>
+      </p:grpSpPr>
+      <p:sp>
+        <p:nvSpPr>
+          <p:cNvPr id="2" name="Title 1">
+            <a:extLst>
+              <a:ext uri="{FF2B5EF4-FFF2-40B4-BE49-F238E27FC236}">
                 <a16:creationId xmlns:a16="http://schemas.microsoft.com/office/drawing/2014/main" id="{0BCB046E-2FC3-4408-8943-A295B7B1A566}"/>
               </a:ext>
             </a:extLst>
@@ -3538,7 +3636,7 @@
 </p:sld>
 </file>
 
-<file path=ppt/slides/slide11.xml><?xml version="1.0" encoding="utf-8"?>
+<file path=ppt/slides/slide12.xml><?xml version="1.0" encoding="utf-8"?>
 <p:sld xmlns:a="http://schemas.openxmlformats.org/drawingml/2006/main" xmlns:r="http://schemas.openxmlformats.org/officeDocument/2006/relationships" xmlns:p="http://schemas.openxmlformats.org/presentationml/2006/main">
   <p:cSld>
     <p:spTree>
@@ -3647,7 +3745,7 @@
 </p:sld>
 </file>
 
-<file path=ppt/slides/slide12.xml><?xml version="1.0" encoding="utf-8"?>
+<file path=ppt/slides/slide13.xml><?xml version="1.0" encoding="utf-8"?>
 <p:sld xmlns:a="http://schemas.openxmlformats.org/drawingml/2006/main" xmlns:r="http://schemas.openxmlformats.org/officeDocument/2006/relationships" xmlns:p="http://schemas.openxmlformats.org/presentationml/2006/main">
   <p:cSld>
     <p:spTree>
@@ -3778,6 +3876,115 @@
           <p:cNvPr id="2" name="Title 1">
             <a:extLst>
               <a:ext uri="{FF2B5EF4-FFF2-40B4-BE49-F238E27FC236}">
+                <a16:creationId xmlns:a16="http://schemas.microsoft.com/office/drawing/2014/main" id="{0220220A-D07A-476D-845A-C30B5E9C5540}"/>
+              </a:ext>
+            </a:extLst>
+          </p:cNvPr>
+          <p:cNvSpPr>
+            <a:spLocks noGrp="1"/>
+          </p:cNvSpPr>
+          <p:nvPr>
+            <p:ph type="title"/>
+          </p:nvPr>
+        </p:nvSpPr>
+        <p:spPr/>
+        <p:txBody>
+          <a:bodyPr/>
+          <a:lstStyle/>
+          <a:p>
+            <a:endParaRPr lang="en-US"/>
+          </a:p>
+        </p:txBody>
+      </p:sp>
+      <p:sp>
+        <p:nvSpPr>
+          <p:cNvPr id="3" name="Content Placeholder 2">
+            <a:extLst>
+              <a:ext uri="{FF2B5EF4-FFF2-40B4-BE49-F238E27FC236}">
+                <a16:creationId xmlns:a16="http://schemas.microsoft.com/office/drawing/2014/main" id="{30071259-8801-42F2-9621-55059D46152A}"/>
+              </a:ext>
+            </a:extLst>
+          </p:cNvPr>
+          <p:cNvSpPr>
+            <a:spLocks noGrp="1"/>
+          </p:cNvSpPr>
+          <p:nvPr>
+            <p:ph idx="1"/>
+          </p:nvPr>
+        </p:nvSpPr>
+        <p:spPr/>
+        <p:txBody>
+          <a:bodyPr/>
+          <a:lstStyle/>
+          <a:p>
+            <a:endParaRPr lang="en-US"/>
+          </a:p>
+        </p:txBody>
+      </p:sp>
+      <p:pic>
+        <p:nvPicPr>
+          <p:cNvPr id="5" name="Picture 4">
+            <a:extLst>
+              <a:ext uri="{FF2B5EF4-FFF2-40B4-BE49-F238E27FC236}">
+                <a16:creationId xmlns:a16="http://schemas.microsoft.com/office/drawing/2014/main" id="{E670FE40-5F9A-44C3-9EAF-DC56D515AD0B}"/>
+              </a:ext>
+            </a:extLst>
+          </p:cNvPr>
+          <p:cNvPicPr>
+            <a:picLocks noChangeAspect="1"/>
+          </p:cNvPicPr>
+          <p:nvPr/>
+        </p:nvPicPr>
+        <p:blipFill rotWithShape="1">
+          <a:blip r:embed="rId2"/>
+          <a:srcRect l="29684" t="12798" r="30526" b="16660"/>
+          <a:stretch/>
+        </p:blipFill>
+        <p:spPr>
+          <a:xfrm>
+            <a:off x="2723949" y="112524"/>
+            <a:ext cx="6824312" cy="6553504"/>
+          </a:xfrm>
+          <a:prstGeom prst="rect">
+            <a:avLst/>
+          </a:prstGeom>
+        </p:spPr>
+      </p:pic>
+    </p:spTree>
+    <p:extLst>
+      <p:ext uri="{BB962C8B-B14F-4D97-AF65-F5344CB8AC3E}">
+        <p14:creationId xmlns:p14="http://schemas.microsoft.com/office/powerpoint/2010/main" val="3008001724"/>
+      </p:ext>
+    </p:extLst>
+  </p:cSld>
+  <p:clrMapOvr>
+    <a:masterClrMapping/>
+  </p:clrMapOvr>
+</p:sld>
+</file>
+
+<file path=ppt/slides/slide3.xml><?xml version="1.0" encoding="utf-8"?>
+<p:sld xmlns:a="http://schemas.openxmlformats.org/drawingml/2006/main" xmlns:r="http://schemas.openxmlformats.org/officeDocument/2006/relationships" xmlns:p="http://schemas.openxmlformats.org/presentationml/2006/main">
+  <p:cSld>
+    <p:spTree>
+      <p:nvGrpSpPr>
+        <p:cNvPr id="1" name=""/>
+        <p:cNvGrpSpPr/>
+        <p:nvPr/>
+      </p:nvGrpSpPr>
+      <p:grpSpPr>
+        <a:xfrm>
+          <a:off x="0" y="0"/>
+          <a:ext cx="0" cy="0"/>
+          <a:chOff x="0" y="0"/>
+          <a:chExt cx="0" cy="0"/>
+        </a:xfrm>
+      </p:grpSpPr>
+      <p:sp>
+        <p:nvSpPr>
+          <p:cNvPr id="2" name="Title 1">
+            <a:extLst>
+              <a:ext uri="{FF2B5EF4-FFF2-40B4-BE49-F238E27FC236}">
                 <a16:creationId xmlns:a16="http://schemas.microsoft.com/office/drawing/2014/main" id="{6DEE0325-4677-45F6-98A3-2F16B7616720}"/>
               </a:ext>
             </a:extLst>
@@ -3865,7 +4072,7 @@
 </p:sld>
 </file>
 
-<file path=ppt/slides/slide3.xml><?xml version="1.0" encoding="utf-8"?>
+<file path=ppt/slides/slide4.xml><?xml version="1.0" encoding="utf-8"?>
 <p:sld xmlns:a="http://schemas.openxmlformats.org/drawingml/2006/main" xmlns:r="http://schemas.openxmlformats.org/officeDocument/2006/relationships" xmlns:p="http://schemas.openxmlformats.org/presentationml/2006/main">
   <p:cSld>
     <p:spTree>
@@ -3974,7 +4181,7 @@
 </p:sld>
 </file>
 
-<file path=ppt/slides/slide4.xml><?xml version="1.0" encoding="utf-8"?>
+<file path=ppt/slides/slide5.xml><?xml version="1.0" encoding="utf-8"?>
 <p:sld xmlns:a="http://schemas.openxmlformats.org/drawingml/2006/main" xmlns:r="http://schemas.openxmlformats.org/officeDocument/2006/relationships" xmlns:p="http://schemas.openxmlformats.org/presentationml/2006/main">
   <p:cSld>
     <p:spTree>
@@ -4083,7 +4290,7 @@
 </p:sld>
 </file>
 
-<file path=ppt/slides/slide5.xml><?xml version="1.0" encoding="utf-8"?>
+<file path=ppt/slides/slide6.xml><?xml version="1.0" encoding="utf-8"?>
 <p:sld xmlns:a="http://schemas.openxmlformats.org/drawingml/2006/main" xmlns:r="http://schemas.openxmlformats.org/officeDocument/2006/relationships" xmlns:p="http://schemas.openxmlformats.org/presentationml/2006/main">
   <p:cSld>
     <p:spTree>
@@ -4221,7 +4428,7 @@
 </p:sld>
 </file>
 
-<file path=ppt/slides/slide6.xml><?xml version="1.0" encoding="utf-8"?>
+<file path=ppt/slides/slide7.xml><?xml version="1.0" encoding="utf-8"?>
 <p:sld xmlns:a="http://schemas.openxmlformats.org/drawingml/2006/main" xmlns:r="http://schemas.openxmlformats.org/officeDocument/2006/relationships" xmlns:p="http://schemas.openxmlformats.org/presentationml/2006/main">
   <p:cSld>
     <p:spTree>
@@ -4330,7 +4537,7 @@
 </p:sld>
 </file>
 
-<file path=ppt/slides/slide7.xml><?xml version="1.0" encoding="utf-8"?>
+<file path=ppt/slides/slide8.xml><?xml version="1.0" encoding="utf-8"?>
 <p:sld xmlns:a="http://schemas.openxmlformats.org/drawingml/2006/main" xmlns:r="http://schemas.openxmlformats.org/officeDocument/2006/relationships" xmlns:p="http://schemas.openxmlformats.org/presentationml/2006/main">
   <p:cSld>
     <p:spTree>
@@ -4468,7 +4675,7 @@
 </p:sld>
 </file>
 
-<file path=ppt/slides/slide8.xml><?xml version="1.0" encoding="utf-8"?>
+<file path=ppt/slides/slide9.xml><?xml version="1.0" encoding="utf-8"?>
 <p:sld xmlns:a="http://schemas.openxmlformats.org/drawingml/2006/main" xmlns:r="http://schemas.openxmlformats.org/officeDocument/2006/relationships" xmlns:p="http://schemas.openxmlformats.org/presentationml/2006/main">
   <p:cSld>
     <p:spTree>
@@ -4568,103 +4775,6 @@
     <p:extLst>
       <p:ext uri="{BB962C8B-B14F-4D97-AF65-F5344CB8AC3E}">
         <p14:creationId xmlns:p14="http://schemas.microsoft.com/office/powerpoint/2010/main" val="3707672601"/>
-      </p:ext>
-    </p:extLst>
-  </p:cSld>
-  <p:clrMapOvr>
-    <a:masterClrMapping/>
-  </p:clrMapOvr>
-</p:sld>
-</file>
-
-<file path=ppt/slides/slide9.xml><?xml version="1.0" encoding="utf-8"?>
-<p:sld xmlns:a="http://schemas.openxmlformats.org/drawingml/2006/main" xmlns:r="http://schemas.openxmlformats.org/officeDocument/2006/relationships" xmlns:p="http://schemas.openxmlformats.org/presentationml/2006/main">
-  <p:cSld>
-    <p:spTree>
-      <p:nvGrpSpPr>
-        <p:cNvPr id="1" name=""/>
-        <p:cNvGrpSpPr/>
-        <p:nvPr/>
-      </p:nvGrpSpPr>
-      <p:grpSpPr>
-        <a:xfrm>
-          <a:off x="0" y="0"/>
-          <a:ext cx="0" cy="0"/>
-          <a:chOff x="0" y="0"/>
-          <a:chExt cx="0" cy="0"/>
-        </a:xfrm>
-      </p:grpSpPr>
-      <p:sp>
-        <p:nvSpPr>
-          <p:cNvPr id="2" name="Title 1">
-            <a:extLst>
-              <a:ext uri="{FF2B5EF4-FFF2-40B4-BE49-F238E27FC236}">
-                <a16:creationId xmlns:a16="http://schemas.microsoft.com/office/drawing/2014/main" id="{6F25426D-49CE-4866-992B-BD5EE93A10DA}"/>
-              </a:ext>
-            </a:extLst>
-          </p:cNvPr>
-          <p:cNvSpPr>
-            <a:spLocks noGrp="1"/>
-          </p:cNvSpPr>
-          <p:nvPr>
-            <p:ph type="title"/>
-          </p:nvPr>
-        </p:nvSpPr>
-        <p:spPr/>
-        <p:txBody>
-          <a:bodyPr/>
-          <a:lstStyle/>
-          <a:p>
-            <a:endParaRPr lang="en-US"/>
-          </a:p>
-        </p:txBody>
-      </p:sp>
-      <p:pic>
-        <p:nvPicPr>
-          <p:cNvPr id="5" name="Content Placeholder 4">
-            <a:extLst>
-              <a:ext uri="{FF2B5EF4-FFF2-40B4-BE49-F238E27FC236}">
-                <a16:creationId xmlns:a16="http://schemas.microsoft.com/office/drawing/2014/main" id="{64F6F3F8-0D62-4BBB-AD3A-D6A324357DD9}"/>
-              </a:ext>
-            </a:extLst>
-          </p:cNvPr>
-          <p:cNvPicPr>
-            <a:picLocks noGrp="1" noChangeAspect="1"/>
-          </p:cNvPicPr>
-          <p:nvPr>
-            <p:ph idx="1"/>
-          </p:nvPr>
-        </p:nvPicPr>
-        <p:blipFill>
-          <a:blip r:embed="rId2">
-            <a:duotone>
-              <a:prstClr val="black"/>
-              <a:schemeClr val="accent3">
-                <a:tint val="45000"/>
-                <a:satMod val="400000"/>
-              </a:schemeClr>
-            </a:duotone>
-            <a:extLst>
-              <a:ext uri="{28A0092B-C50C-407E-A947-70E740481C1C}">
-                <a14:useLocalDpi xmlns:a14="http://schemas.microsoft.com/office/drawing/2010/main" val="0"/>
-              </a:ext>
-            </a:extLst>
-          </a:blip>
-          <a:stretch>
-            <a:fillRect/>
-          </a:stretch>
-        </p:blipFill>
-        <p:spPr>
-          <a:xfrm>
-            <a:off x="2564489" y="469783"/>
-            <a:ext cx="5436511" cy="5436511"/>
-          </a:xfrm>
-        </p:spPr>
-      </p:pic>
-    </p:spTree>
-    <p:extLst>
-      <p:ext uri="{BB962C8B-B14F-4D97-AF65-F5344CB8AC3E}">
-        <p14:creationId xmlns:p14="http://schemas.microsoft.com/office/powerpoint/2010/main" val="3005326315"/>
       </p:ext>
     </p:extLst>
   </p:cSld>

--- a/src/data/images.pptx
+++ b/src/data/images.pptx
@@ -6,18 +6,19 @@
   </p:sldMasterIdLst>
   <p:sldIdLst>
     <p:sldId id="256" r:id="rId2"/>
-    <p:sldId id="268" r:id="rId3"/>
-    <p:sldId id="267" r:id="rId4"/>
-    <p:sldId id="258" r:id="rId5"/>
-    <p:sldId id="257" r:id="rId6"/>
-    <p:sldId id="259" r:id="rId7"/>
-    <p:sldId id="260" r:id="rId8"/>
-    <p:sldId id="261" r:id="rId9"/>
-    <p:sldId id="262" r:id="rId10"/>
-    <p:sldId id="263" r:id="rId11"/>
-    <p:sldId id="264" r:id="rId12"/>
-    <p:sldId id="266" r:id="rId13"/>
-    <p:sldId id="265" r:id="rId14"/>
+    <p:sldId id="269" r:id="rId3"/>
+    <p:sldId id="268" r:id="rId4"/>
+    <p:sldId id="267" r:id="rId5"/>
+    <p:sldId id="258" r:id="rId6"/>
+    <p:sldId id="257" r:id="rId7"/>
+    <p:sldId id="259" r:id="rId8"/>
+    <p:sldId id="260" r:id="rId9"/>
+    <p:sldId id="261" r:id="rId10"/>
+    <p:sldId id="262" r:id="rId11"/>
+    <p:sldId id="263" r:id="rId12"/>
+    <p:sldId id="264" r:id="rId13"/>
+    <p:sldId id="266" r:id="rId14"/>
+    <p:sldId id="265" r:id="rId15"/>
   </p:sldIdLst>
   <p:sldSz cx="12192000" cy="6858000"/>
   <p:notesSz cx="6858000" cy="9144000"/>
@@ -271,7 +272,7 @@
           <a:p>
             <a:fld id="{621A180A-8C38-4DA9-BE14-020F85743E22}" type="datetimeFigureOut">
               <a:rPr lang="en-US" smtClean="0"/>
-              <a:t>1/3/2026</a:t>
+              <a:t>4/23/2026</a:t>
             </a:fld>
             <a:endParaRPr lang="en-US"/>
           </a:p>
@@ -469,7 +470,7 @@
           <a:p>
             <a:fld id="{621A180A-8C38-4DA9-BE14-020F85743E22}" type="datetimeFigureOut">
               <a:rPr lang="en-US" smtClean="0"/>
-              <a:t>1/3/2026</a:t>
+              <a:t>4/23/2026</a:t>
             </a:fld>
             <a:endParaRPr lang="en-US"/>
           </a:p>
@@ -677,7 +678,7 @@
           <a:p>
             <a:fld id="{621A180A-8C38-4DA9-BE14-020F85743E22}" type="datetimeFigureOut">
               <a:rPr lang="en-US" smtClean="0"/>
-              <a:t>1/3/2026</a:t>
+              <a:t>4/23/2026</a:t>
             </a:fld>
             <a:endParaRPr lang="en-US"/>
           </a:p>
@@ -875,7 +876,7 @@
           <a:p>
             <a:fld id="{621A180A-8C38-4DA9-BE14-020F85743E22}" type="datetimeFigureOut">
               <a:rPr lang="en-US" smtClean="0"/>
-              <a:t>1/3/2026</a:t>
+              <a:t>4/23/2026</a:t>
             </a:fld>
             <a:endParaRPr lang="en-US"/>
           </a:p>
@@ -1150,7 +1151,7 @@
           <a:p>
             <a:fld id="{621A180A-8C38-4DA9-BE14-020F85743E22}" type="datetimeFigureOut">
               <a:rPr lang="en-US" smtClean="0"/>
-              <a:t>1/3/2026</a:t>
+              <a:t>4/23/2026</a:t>
             </a:fld>
             <a:endParaRPr lang="en-US"/>
           </a:p>
@@ -1415,7 +1416,7 @@
           <a:p>
             <a:fld id="{621A180A-8C38-4DA9-BE14-020F85743E22}" type="datetimeFigureOut">
               <a:rPr lang="en-US" smtClean="0"/>
-              <a:t>1/3/2026</a:t>
+              <a:t>4/23/2026</a:t>
             </a:fld>
             <a:endParaRPr lang="en-US"/>
           </a:p>
@@ -1827,7 +1828,7 @@
           <a:p>
             <a:fld id="{621A180A-8C38-4DA9-BE14-020F85743E22}" type="datetimeFigureOut">
               <a:rPr lang="en-US" smtClean="0"/>
-              <a:t>1/3/2026</a:t>
+              <a:t>4/23/2026</a:t>
             </a:fld>
             <a:endParaRPr lang="en-US"/>
           </a:p>
@@ -1968,7 +1969,7 @@
           <a:p>
             <a:fld id="{621A180A-8C38-4DA9-BE14-020F85743E22}" type="datetimeFigureOut">
               <a:rPr lang="en-US" smtClean="0"/>
-              <a:t>1/3/2026</a:t>
+              <a:t>4/23/2026</a:t>
             </a:fld>
             <a:endParaRPr lang="en-US"/>
           </a:p>
@@ -2081,7 +2082,7 @@
           <a:p>
             <a:fld id="{621A180A-8C38-4DA9-BE14-020F85743E22}" type="datetimeFigureOut">
               <a:rPr lang="en-US" smtClean="0"/>
-              <a:t>1/3/2026</a:t>
+              <a:t>4/23/2026</a:t>
             </a:fld>
             <a:endParaRPr lang="en-US"/>
           </a:p>
@@ -2392,7 +2393,7 @@
           <a:p>
             <a:fld id="{621A180A-8C38-4DA9-BE14-020F85743E22}" type="datetimeFigureOut">
               <a:rPr lang="en-US" smtClean="0"/>
-              <a:t>1/3/2026</a:t>
+              <a:t>4/23/2026</a:t>
             </a:fld>
             <a:endParaRPr lang="en-US"/>
           </a:p>
@@ -2680,7 +2681,7 @@
           <a:p>
             <a:fld id="{621A180A-8C38-4DA9-BE14-020F85743E22}" type="datetimeFigureOut">
               <a:rPr lang="en-US" smtClean="0"/>
-              <a:t>1/3/2026</a:t>
+              <a:t>4/23/2026</a:t>
             </a:fld>
             <a:endParaRPr lang="en-US"/>
           </a:p>
@@ -2921,7 +2922,7 @@
           <a:p>
             <a:fld id="{621A180A-8C38-4DA9-BE14-020F85743E22}" type="datetimeFigureOut">
               <a:rPr lang="en-US" smtClean="0"/>
-              <a:t>1/3/2026</a:t>
+              <a:t>4/23/2026</a:t>
             </a:fld>
             <a:endParaRPr lang="en-US"/>
           </a:p>
@@ -3452,6 +3453,115 @@
           <p:cNvPr id="2" name="Title 1">
             <a:extLst>
               <a:ext uri="{FF2B5EF4-FFF2-40B4-BE49-F238E27FC236}">
+                <a16:creationId xmlns:a16="http://schemas.microsoft.com/office/drawing/2014/main" id="{A5BD857A-7A26-43E1-B0FA-9655B8662AB9}"/>
+              </a:ext>
+            </a:extLst>
+          </p:cNvPr>
+          <p:cNvSpPr>
+            <a:spLocks noGrp="1"/>
+          </p:cNvSpPr>
+          <p:nvPr>
+            <p:ph type="title"/>
+          </p:nvPr>
+        </p:nvSpPr>
+        <p:spPr/>
+        <p:txBody>
+          <a:bodyPr/>
+          <a:lstStyle/>
+          <a:p>
+            <a:endParaRPr lang="en-US"/>
+          </a:p>
+        </p:txBody>
+      </p:sp>
+      <p:sp>
+        <p:nvSpPr>
+          <p:cNvPr id="3" name="Content Placeholder 2">
+            <a:extLst>
+              <a:ext uri="{FF2B5EF4-FFF2-40B4-BE49-F238E27FC236}">
+                <a16:creationId xmlns:a16="http://schemas.microsoft.com/office/drawing/2014/main" id="{D78F526A-3C2D-45B1-A2C9-FBB2327254B0}"/>
+              </a:ext>
+            </a:extLst>
+          </p:cNvPr>
+          <p:cNvSpPr>
+            <a:spLocks noGrp="1"/>
+          </p:cNvSpPr>
+          <p:nvPr>
+            <p:ph idx="1"/>
+          </p:nvPr>
+        </p:nvSpPr>
+        <p:spPr/>
+        <p:txBody>
+          <a:bodyPr/>
+          <a:lstStyle/>
+          <a:p>
+            <a:endParaRPr lang="en-US"/>
+          </a:p>
+        </p:txBody>
+      </p:sp>
+      <p:pic>
+        <p:nvPicPr>
+          <p:cNvPr id="4" name="Picture 3">
+            <a:extLst>
+              <a:ext uri="{FF2B5EF4-FFF2-40B4-BE49-F238E27FC236}">
+                <a16:creationId xmlns:a16="http://schemas.microsoft.com/office/drawing/2014/main" id="{08063691-4E1B-42FF-9E17-9768EE975BCA}"/>
+              </a:ext>
+            </a:extLst>
+          </p:cNvPr>
+          <p:cNvPicPr>
+            <a:picLocks noChangeAspect="1"/>
+          </p:cNvPicPr>
+          <p:nvPr/>
+        </p:nvPicPr>
+        <p:blipFill rotWithShape="1">
+          <a:blip r:embed="rId2"/>
+          <a:srcRect l="4515" t="19417" r="6875" b="12233"/>
+          <a:stretch/>
+        </p:blipFill>
+        <p:spPr>
+          <a:xfrm>
+            <a:off x="0" y="1038688"/>
+            <a:ext cx="12166381" cy="5278792"/>
+          </a:xfrm>
+          <a:prstGeom prst="rect">
+            <a:avLst/>
+          </a:prstGeom>
+        </p:spPr>
+      </p:pic>
+    </p:spTree>
+    <p:extLst>
+      <p:ext uri="{BB962C8B-B14F-4D97-AF65-F5344CB8AC3E}">
+        <p14:creationId xmlns:p14="http://schemas.microsoft.com/office/powerpoint/2010/main" val="3707672601"/>
+      </p:ext>
+    </p:extLst>
+  </p:cSld>
+  <p:clrMapOvr>
+    <a:masterClrMapping/>
+  </p:clrMapOvr>
+</p:sld>
+</file>
+
+<file path=ppt/slides/slide11.xml><?xml version="1.0" encoding="utf-8"?>
+<p:sld xmlns:a="http://schemas.openxmlformats.org/drawingml/2006/main" xmlns:r="http://schemas.openxmlformats.org/officeDocument/2006/relationships" xmlns:p="http://schemas.openxmlformats.org/presentationml/2006/main">
+  <p:cSld>
+    <p:spTree>
+      <p:nvGrpSpPr>
+        <p:cNvPr id="1" name=""/>
+        <p:cNvGrpSpPr/>
+        <p:nvPr/>
+      </p:nvGrpSpPr>
+      <p:grpSpPr>
+        <a:xfrm>
+          <a:off x="0" y="0"/>
+          <a:ext cx="0" cy="0"/>
+          <a:chOff x="0" y="0"/>
+          <a:chExt cx="0" cy="0"/>
+        </a:xfrm>
+      </p:grpSpPr>
+      <p:sp>
+        <p:nvSpPr>
+          <p:cNvPr id="2" name="Title 1">
+            <a:extLst>
+              <a:ext uri="{FF2B5EF4-FFF2-40B4-BE49-F238E27FC236}">
                 <a16:creationId xmlns:a16="http://schemas.microsoft.com/office/drawing/2014/main" id="{6F25426D-49CE-4866-992B-BD5EE93A10DA}"/>
               </a:ext>
             </a:extLst>
@@ -3527,7 +3637,7 @@
 </p:sld>
 </file>
 
-<file path=ppt/slides/slide11.xml><?xml version="1.0" encoding="utf-8"?>
+<file path=ppt/slides/slide12.xml><?xml version="1.0" encoding="utf-8"?>
 <p:sld xmlns:a="http://schemas.openxmlformats.org/drawingml/2006/main" xmlns:r="http://schemas.openxmlformats.org/officeDocument/2006/relationships" xmlns:p="http://schemas.openxmlformats.org/presentationml/2006/main">
   <p:cSld>
     <p:spTree>
@@ -3636,7 +3746,7 @@
 </p:sld>
 </file>
 
-<file path=ppt/slides/slide12.xml><?xml version="1.0" encoding="utf-8"?>
+<file path=ppt/slides/slide13.xml><?xml version="1.0" encoding="utf-8"?>
 <p:sld xmlns:a="http://schemas.openxmlformats.org/drawingml/2006/main" xmlns:r="http://schemas.openxmlformats.org/officeDocument/2006/relationships" xmlns:p="http://schemas.openxmlformats.org/presentationml/2006/main">
   <p:cSld>
     <p:spTree>
@@ -3745,7 +3855,7 @@
 </p:sld>
 </file>
 
-<file path=ppt/slides/slide13.xml><?xml version="1.0" encoding="utf-8"?>
+<file path=ppt/slides/slide14.xml><?xml version="1.0" encoding="utf-8"?>
 <p:sld xmlns:a="http://schemas.openxmlformats.org/drawingml/2006/main" xmlns:r="http://schemas.openxmlformats.org/officeDocument/2006/relationships" xmlns:p="http://schemas.openxmlformats.org/presentationml/2006/main">
   <p:cSld>
     <p:spTree>
@@ -3876,6 +3986,115 @@
           <p:cNvPr id="2" name="Title 1">
             <a:extLst>
               <a:ext uri="{FF2B5EF4-FFF2-40B4-BE49-F238E27FC236}">
+                <a16:creationId xmlns:a16="http://schemas.microsoft.com/office/drawing/2014/main" id="{8021772D-EC37-D7A6-E3B5-B0386C77B779}"/>
+              </a:ext>
+            </a:extLst>
+          </p:cNvPr>
+          <p:cNvSpPr>
+            <a:spLocks noGrp="1"/>
+          </p:cNvSpPr>
+          <p:nvPr>
+            <p:ph type="title"/>
+          </p:nvPr>
+        </p:nvSpPr>
+        <p:spPr/>
+        <p:txBody>
+          <a:bodyPr/>
+          <a:lstStyle/>
+          <a:p>
+            <a:endParaRPr lang="en-US"/>
+          </a:p>
+        </p:txBody>
+      </p:sp>
+      <p:sp>
+        <p:nvSpPr>
+          <p:cNvPr id="3" name="Content Placeholder 2">
+            <a:extLst>
+              <a:ext uri="{FF2B5EF4-FFF2-40B4-BE49-F238E27FC236}">
+                <a16:creationId xmlns:a16="http://schemas.microsoft.com/office/drawing/2014/main" id="{439E703A-7374-F37B-F13C-EA72070CDA9F}"/>
+              </a:ext>
+            </a:extLst>
+          </p:cNvPr>
+          <p:cNvSpPr>
+            <a:spLocks noGrp="1"/>
+          </p:cNvSpPr>
+          <p:nvPr>
+            <p:ph idx="1"/>
+          </p:nvPr>
+        </p:nvSpPr>
+        <p:spPr/>
+        <p:txBody>
+          <a:bodyPr/>
+          <a:lstStyle/>
+          <a:p>
+            <a:endParaRPr lang="en-US" dirty="0"/>
+          </a:p>
+        </p:txBody>
+      </p:sp>
+      <p:pic>
+        <p:nvPicPr>
+          <p:cNvPr id="5" name="Picture 4">
+            <a:extLst>
+              <a:ext uri="{FF2B5EF4-FFF2-40B4-BE49-F238E27FC236}">
+                <a16:creationId xmlns:a16="http://schemas.microsoft.com/office/drawing/2014/main" id="{CA557BE4-9E01-BF06-08D8-77D3A4E9358D}"/>
+              </a:ext>
+            </a:extLst>
+          </p:cNvPr>
+          <p:cNvPicPr>
+            <a:picLocks noChangeAspect="1"/>
+          </p:cNvPicPr>
+          <p:nvPr/>
+        </p:nvPicPr>
+        <p:blipFill>
+          <a:blip r:embed="rId2"/>
+          <a:srcRect l="30469" t="8690" r="30390" b="23983"/>
+          <a:stretch/>
+        </p:blipFill>
+        <p:spPr>
+          <a:xfrm>
+            <a:off x="1707478" y="0"/>
+            <a:ext cx="7417472" cy="6858000"/>
+          </a:xfrm>
+          <a:prstGeom prst="rect">
+            <a:avLst/>
+          </a:prstGeom>
+        </p:spPr>
+      </p:pic>
+    </p:spTree>
+    <p:extLst>
+      <p:ext uri="{BB962C8B-B14F-4D97-AF65-F5344CB8AC3E}">
+        <p14:creationId xmlns:p14="http://schemas.microsoft.com/office/powerpoint/2010/main" val="2823699127"/>
+      </p:ext>
+    </p:extLst>
+  </p:cSld>
+  <p:clrMapOvr>
+    <a:masterClrMapping/>
+  </p:clrMapOvr>
+</p:sld>
+</file>
+
+<file path=ppt/slides/slide3.xml><?xml version="1.0" encoding="utf-8"?>
+<p:sld xmlns:a="http://schemas.openxmlformats.org/drawingml/2006/main" xmlns:r="http://schemas.openxmlformats.org/officeDocument/2006/relationships" xmlns:p="http://schemas.openxmlformats.org/presentationml/2006/main">
+  <p:cSld>
+    <p:spTree>
+      <p:nvGrpSpPr>
+        <p:cNvPr id="1" name=""/>
+        <p:cNvGrpSpPr/>
+        <p:nvPr/>
+      </p:nvGrpSpPr>
+      <p:grpSpPr>
+        <a:xfrm>
+          <a:off x="0" y="0"/>
+          <a:ext cx="0" cy="0"/>
+          <a:chOff x="0" y="0"/>
+          <a:chExt cx="0" cy="0"/>
+        </a:xfrm>
+      </p:grpSpPr>
+      <p:sp>
+        <p:nvSpPr>
+          <p:cNvPr id="2" name="Title 1">
+            <a:extLst>
+              <a:ext uri="{FF2B5EF4-FFF2-40B4-BE49-F238E27FC236}">
                 <a16:creationId xmlns:a16="http://schemas.microsoft.com/office/drawing/2014/main" id="{0220220A-D07A-476D-845A-C30B5E9C5540}"/>
               </a:ext>
             </a:extLst>
@@ -3963,7 +4182,7 @@
 </p:sld>
 </file>
 
-<file path=ppt/slides/slide3.xml><?xml version="1.0" encoding="utf-8"?>
+<file path=ppt/slides/slide4.xml><?xml version="1.0" encoding="utf-8"?>
 <p:sld xmlns:a="http://schemas.openxmlformats.org/drawingml/2006/main" xmlns:r="http://schemas.openxmlformats.org/officeDocument/2006/relationships" xmlns:p="http://schemas.openxmlformats.org/presentationml/2006/main">
   <p:cSld>
     <p:spTree>
@@ -4072,7 +4291,7 @@
 </p:sld>
 </file>
 
-<file path=ppt/slides/slide4.xml><?xml version="1.0" encoding="utf-8"?>
+<file path=ppt/slides/slide5.xml><?xml version="1.0" encoding="utf-8"?>
 <p:sld xmlns:a="http://schemas.openxmlformats.org/drawingml/2006/main" xmlns:r="http://schemas.openxmlformats.org/officeDocument/2006/relationships" xmlns:p="http://schemas.openxmlformats.org/presentationml/2006/main">
   <p:cSld>
     <p:spTree>
@@ -4181,7 +4400,7 @@
 </p:sld>
 </file>
 
-<file path=ppt/slides/slide5.xml><?xml version="1.0" encoding="utf-8"?>
+<file path=ppt/slides/slide6.xml><?xml version="1.0" encoding="utf-8"?>
 <p:sld xmlns:a="http://schemas.openxmlformats.org/drawingml/2006/main" xmlns:r="http://schemas.openxmlformats.org/officeDocument/2006/relationships" xmlns:p="http://schemas.openxmlformats.org/presentationml/2006/main">
   <p:cSld>
     <p:spTree>
@@ -4290,7 +4509,7 @@
 </p:sld>
 </file>
 
-<file path=ppt/slides/slide6.xml><?xml version="1.0" encoding="utf-8"?>
+<file path=ppt/slides/slide7.xml><?xml version="1.0" encoding="utf-8"?>
 <p:sld xmlns:a="http://schemas.openxmlformats.org/drawingml/2006/main" xmlns:r="http://schemas.openxmlformats.org/officeDocument/2006/relationships" xmlns:p="http://schemas.openxmlformats.org/presentationml/2006/main">
   <p:cSld>
     <p:spTree>
@@ -4428,7 +4647,7 @@
 </p:sld>
 </file>
 
-<file path=ppt/slides/slide7.xml><?xml version="1.0" encoding="utf-8"?>
+<file path=ppt/slides/slide8.xml><?xml version="1.0" encoding="utf-8"?>
 <p:sld xmlns:a="http://schemas.openxmlformats.org/drawingml/2006/main" xmlns:r="http://schemas.openxmlformats.org/officeDocument/2006/relationships" xmlns:p="http://schemas.openxmlformats.org/presentationml/2006/main">
   <p:cSld>
     <p:spTree>
@@ -4537,7 +4756,7 @@
 </p:sld>
 </file>
 
-<file path=ppt/slides/slide8.xml><?xml version="1.0" encoding="utf-8"?>
+<file path=ppt/slides/slide9.xml><?xml version="1.0" encoding="utf-8"?>
 <p:sld xmlns:a="http://schemas.openxmlformats.org/drawingml/2006/main" xmlns:r="http://schemas.openxmlformats.org/officeDocument/2006/relationships" xmlns:p="http://schemas.openxmlformats.org/presentationml/2006/main">
   <p:cSld>
     <p:spTree>
@@ -4666,115 +4885,6 @@
     <p:extLst>
       <p:ext uri="{BB962C8B-B14F-4D97-AF65-F5344CB8AC3E}">
         <p14:creationId xmlns:p14="http://schemas.microsoft.com/office/powerpoint/2010/main" val="1636377720"/>
-      </p:ext>
-    </p:extLst>
-  </p:cSld>
-  <p:clrMapOvr>
-    <a:masterClrMapping/>
-  </p:clrMapOvr>
-</p:sld>
-</file>
-
-<file path=ppt/slides/slide9.xml><?xml version="1.0" encoding="utf-8"?>
-<p:sld xmlns:a="http://schemas.openxmlformats.org/drawingml/2006/main" xmlns:r="http://schemas.openxmlformats.org/officeDocument/2006/relationships" xmlns:p="http://schemas.openxmlformats.org/presentationml/2006/main">
-  <p:cSld>
-    <p:spTree>
-      <p:nvGrpSpPr>
-        <p:cNvPr id="1" name=""/>
-        <p:cNvGrpSpPr/>
-        <p:nvPr/>
-      </p:nvGrpSpPr>
-      <p:grpSpPr>
-        <a:xfrm>
-          <a:off x="0" y="0"/>
-          <a:ext cx="0" cy="0"/>
-          <a:chOff x="0" y="0"/>
-          <a:chExt cx="0" cy="0"/>
-        </a:xfrm>
-      </p:grpSpPr>
-      <p:sp>
-        <p:nvSpPr>
-          <p:cNvPr id="2" name="Title 1">
-            <a:extLst>
-              <a:ext uri="{FF2B5EF4-FFF2-40B4-BE49-F238E27FC236}">
-                <a16:creationId xmlns:a16="http://schemas.microsoft.com/office/drawing/2014/main" id="{A5BD857A-7A26-43E1-B0FA-9655B8662AB9}"/>
-              </a:ext>
-            </a:extLst>
-          </p:cNvPr>
-          <p:cNvSpPr>
-            <a:spLocks noGrp="1"/>
-          </p:cNvSpPr>
-          <p:nvPr>
-            <p:ph type="title"/>
-          </p:nvPr>
-        </p:nvSpPr>
-        <p:spPr/>
-        <p:txBody>
-          <a:bodyPr/>
-          <a:lstStyle/>
-          <a:p>
-            <a:endParaRPr lang="en-US"/>
-          </a:p>
-        </p:txBody>
-      </p:sp>
-      <p:sp>
-        <p:nvSpPr>
-          <p:cNvPr id="3" name="Content Placeholder 2">
-            <a:extLst>
-              <a:ext uri="{FF2B5EF4-FFF2-40B4-BE49-F238E27FC236}">
-                <a16:creationId xmlns:a16="http://schemas.microsoft.com/office/drawing/2014/main" id="{D78F526A-3C2D-45B1-A2C9-FBB2327254B0}"/>
-              </a:ext>
-            </a:extLst>
-          </p:cNvPr>
-          <p:cNvSpPr>
-            <a:spLocks noGrp="1"/>
-          </p:cNvSpPr>
-          <p:nvPr>
-            <p:ph idx="1"/>
-          </p:nvPr>
-        </p:nvSpPr>
-        <p:spPr/>
-        <p:txBody>
-          <a:bodyPr/>
-          <a:lstStyle/>
-          <a:p>
-            <a:endParaRPr lang="en-US"/>
-          </a:p>
-        </p:txBody>
-      </p:sp>
-      <p:pic>
-        <p:nvPicPr>
-          <p:cNvPr id="4" name="Picture 3">
-            <a:extLst>
-              <a:ext uri="{FF2B5EF4-FFF2-40B4-BE49-F238E27FC236}">
-                <a16:creationId xmlns:a16="http://schemas.microsoft.com/office/drawing/2014/main" id="{08063691-4E1B-42FF-9E17-9768EE975BCA}"/>
-              </a:ext>
-            </a:extLst>
-          </p:cNvPr>
-          <p:cNvPicPr>
-            <a:picLocks noChangeAspect="1"/>
-          </p:cNvPicPr>
-          <p:nvPr/>
-        </p:nvPicPr>
-        <p:blipFill rotWithShape="1">
-          <a:blip r:embed="rId2"/>
-          <a:srcRect l="4515" t="19417" r="6875" b="12233"/>
-          <a:stretch/>
-        </p:blipFill>
-        <p:spPr>
-          <a:xfrm>
-            <a:off x="0" y="1038688"/>
-            <a:ext cx="12166381" cy="5278792"/>
-          </a:xfrm>
-          <a:prstGeom prst="rect">
-            <a:avLst/>
-          </a:prstGeom>
-        </p:spPr>
-      </p:pic>
-    </p:spTree>
-    <p:extLst>
-      <p:ext uri="{BB962C8B-B14F-4D97-AF65-F5344CB8AC3E}">
-        <p14:creationId xmlns:p14="http://schemas.microsoft.com/office/powerpoint/2010/main" val="3707672601"/>
       </p:ext>
     </p:extLst>
   </p:cSld>

--- a/src/data/images.pptx
+++ b/src/data/images.pptx
@@ -19,6 +19,7 @@
     <p:sldId id="264" r:id="rId13"/>
     <p:sldId id="266" r:id="rId14"/>
     <p:sldId id="265" r:id="rId15"/>
+    <p:sldId id="270" r:id="rId16"/>
   </p:sldIdLst>
   <p:sldSz cx="12192000" cy="6858000"/>
   <p:notesSz cx="6858000" cy="9144000"/>
@@ -272,7 +273,7 @@
           <a:p>
             <a:fld id="{621A180A-8C38-4DA9-BE14-020F85743E22}" type="datetimeFigureOut">
               <a:rPr lang="en-US" smtClean="0"/>
-              <a:t>4/23/2026</a:t>
+              <a:t>8/4/2026</a:t>
             </a:fld>
             <a:endParaRPr lang="en-US"/>
           </a:p>
@@ -470,7 +471,7 @@
           <a:p>
             <a:fld id="{621A180A-8C38-4DA9-BE14-020F85743E22}" type="datetimeFigureOut">
               <a:rPr lang="en-US" smtClean="0"/>
-              <a:t>4/23/2026</a:t>
+              <a:t>8/4/2026</a:t>
             </a:fld>
             <a:endParaRPr lang="en-US"/>
           </a:p>
@@ -678,7 +679,7 @@
           <a:p>
             <a:fld id="{621A180A-8C38-4DA9-BE14-020F85743E22}" type="datetimeFigureOut">
               <a:rPr lang="en-US" smtClean="0"/>
-              <a:t>4/23/2026</a:t>
+              <a:t>8/4/2026</a:t>
             </a:fld>
             <a:endParaRPr lang="en-US"/>
           </a:p>
@@ -876,7 +877,7 @@
           <a:p>
             <a:fld id="{621A180A-8C38-4DA9-BE14-020F85743E22}" type="datetimeFigureOut">
               <a:rPr lang="en-US" smtClean="0"/>
-              <a:t>4/23/2026</a:t>
+              <a:t>8/4/2026</a:t>
             </a:fld>
             <a:endParaRPr lang="en-US"/>
           </a:p>
@@ -1151,7 +1152,7 @@
           <a:p>
             <a:fld id="{621A180A-8C38-4DA9-BE14-020F85743E22}" type="datetimeFigureOut">
               <a:rPr lang="en-US" smtClean="0"/>
-              <a:t>4/23/2026</a:t>
+              <a:t>8/4/2026</a:t>
             </a:fld>
             <a:endParaRPr lang="en-US"/>
           </a:p>
@@ -1416,7 +1417,7 @@
           <a:p>
             <a:fld id="{621A180A-8C38-4DA9-BE14-020F85743E22}" type="datetimeFigureOut">
               <a:rPr lang="en-US" smtClean="0"/>
-              <a:t>4/23/2026</a:t>
+              <a:t>8/4/2026</a:t>
             </a:fld>
             <a:endParaRPr lang="en-US"/>
           </a:p>
@@ -1828,7 +1829,7 @@
           <a:p>
             <a:fld id="{621A180A-8C38-4DA9-BE14-020F85743E22}" type="datetimeFigureOut">
               <a:rPr lang="en-US" smtClean="0"/>
-              <a:t>4/23/2026</a:t>
+              <a:t>8/4/2026</a:t>
             </a:fld>
             <a:endParaRPr lang="en-US"/>
           </a:p>
@@ -1969,7 +1970,7 @@
           <a:p>
             <a:fld id="{621A180A-8C38-4DA9-BE14-020F85743E22}" type="datetimeFigureOut">
               <a:rPr lang="en-US" smtClean="0"/>
-              <a:t>4/23/2026</a:t>
+              <a:t>8/4/2026</a:t>
             </a:fld>
             <a:endParaRPr lang="en-US"/>
           </a:p>
@@ -2082,7 +2083,7 @@
           <a:p>
             <a:fld id="{621A180A-8C38-4DA9-BE14-020F85743E22}" type="datetimeFigureOut">
               <a:rPr lang="en-US" smtClean="0"/>
-              <a:t>4/23/2026</a:t>
+              <a:t>8/4/2026</a:t>
             </a:fld>
             <a:endParaRPr lang="en-US"/>
           </a:p>
@@ -2393,7 +2394,7 @@
           <a:p>
             <a:fld id="{621A180A-8C38-4DA9-BE14-020F85743E22}" type="datetimeFigureOut">
               <a:rPr lang="en-US" smtClean="0"/>
-              <a:t>4/23/2026</a:t>
+              <a:t>8/4/2026</a:t>
             </a:fld>
             <a:endParaRPr lang="en-US"/>
           </a:p>
@@ -2681,7 +2682,7 @@
           <a:p>
             <a:fld id="{621A180A-8C38-4DA9-BE14-020F85743E22}" type="datetimeFigureOut">
               <a:rPr lang="en-US" smtClean="0"/>
-              <a:t>4/23/2026</a:t>
+              <a:t>8/4/2026</a:t>
             </a:fld>
             <a:endParaRPr lang="en-US"/>
           </a:p>
@@ -2922,7 +2923,7 @@
           <a:p>
             <a:fld id="{621A180A-8C38-4DA9-BE14-020F85743E22}" type="datetimeFigureOut">
               <a:rPr lang="en-US" smtClean="0"/>
-              <a:t>4/23/2026</a:t>
+              <a:t>8/4/2026</a:t>
             </a:fld>
             <a:endParaRPr lang="en-US"/>
           </a:p>
@@ -3955,6 +3956,115 @@
     <p:extLst>
       <p:ext uri="{BB962C8B-B14F-4D97-AF65-F5344CB8AC3E}">
         <p14:creationId xmlns:p14="http://schemas.microsoft.com/office/powerpoint/2010/main" val="3944916952"/>
+      </p:ext>
+    </p:extLst>
+  </p:cSld>
+  <p:clrMapOvr>
+    <a:masterClrMapping/>
+  </p:clrMapOvr>
+</p:sld>
+</file>
+
+<file path=ppt/slides/slide15.xml><?xml version="1.0" encoding="utf-8"?>
+<p:sld xmlns:a="http://schemas.openxmlformats.org/drawingml/2006/main" xmlns:r="http://schemas.openxmlformats.org/officeDocument/2006/relationships" xmlns:p="http://schemas.openxmlformats.org/presentationml/2006/main">
+  <p:cSld>
+    <p:spTree>
+      <p:nvGrpSpPr>
+        <p:cNvPr id="1" name=""/>
+        <p:cNvGrpSpPr/>
+        <p:nvPr/>
+      </p:nvGrpSpPr>
+      <p:grpSpPr>
+        <a:xfrm>
+          <a:off x="0" y="0"/>
+          <a:ext cx="0" cy="0"/>
+          <a:chOff x="0" y="0"/>
+          <a:chExt cx="0" cy="0"/>
+        </a:xfrm>
+      </p:grpSpPr>
+      <p:sp>
+        <p:nvSpPr>
+          <p:cNvPr id="2" name="Title 1">
+            <a:extLst>
+              <a:ext uri="{FF2B5EF4-FFF2-40B4-BE49-F238E27FC236}">
+                <a16:creationId xmlns:a16="http://schemas.microsoft.com/office/drawing/2014/main" id="{601C2647-762B-153A-8543-EC2EE0DBB196}"/>
+              </a:ext>
+            </a:extLst>
+          </p:cNvPr>
+          <p:cNvSpPr>
+            <a:spLocks noGrp="1"/>
+          </p:cNvSpPr>
+          <p:nvPr>
+            <p:ph type="title"/>
+          </p:nvPr>
+        </p:nvSpPr>
+        <p:spPr/>
+        <p:txBody>
+          <a:bodyPr/>
+          <a:lstStyle/>
+          <a:p>
+            <a:endParaRPr lang="en-US"/>
+          </a:p>
+        </p:txBody>
+      </p:sp>
+      <p:sp>
+        <p:nvSpPr>
+          <p:cNvPr id="3" name="Content Placeholder 2">
+            <a:extLst>
+              <a:ext uri="{FF2B5EF4-FFF2-40B4-BE49-F238E27FC236}">
+                <a16:creationId xmlns:a16="http://schemas.microsoft.com/office/drawing/2014/main" id="{1FEAD804-EC99-5C8B-379D-FD97B3688764}"/>
+              </a:ext>
+            </a:extLst>
+          </p:cNvPr>
+          <p:cNvSpPr>
+            <a:spLocks noGrp="1"/>
+          </p:cNvSpPr>
+          <p:nvPr>
+            <p:ph idx="1"/>
+          </p:nvPr>
+        </p:nvSpPr>
+        <p:spPr/>
+        <p:txBody>
+          <a:bodyPr/>
+          <a:lstStyle/>
+          <a:p>
+            <a:endParaRPr lang="en-US"/>
+          </a:p>
+        </p:txBody>
+      </p:sp>
+      <p:pic>
+        <p:nvPicPr>
+          <p:cNvPr id="5" name="Picture 4">
+            <a:extLst>
+              <a:ext uri="{FF2B5EF4-FFF2-40B4-BE49-F238E27FC236}">
+                <a16:creationId xmlns:a16="http://schemas.microsoft.com/office/drawing/2014/main" id="{ABEF9FDB-B09D-307B-E29B-0E9530952094}"/>
+              </a:ext>
+            </a:extLst>
+          </p:cNvPr>
+          <p:cNvPicPr>
+            <a:picLocks noChangeAspect="1"/>
+          </p:cNvPicPr>
+          <p:nvPr/>
+        </p:nvPicPr>
+        <p:blipFill>
+          <a:blip r:embed="rId2"/>
+          <a:srcRect l="24623" t="13402" r="23868" b="-1496"/>
+          <a:stretch/>
+        </p:blipFill>
+        <p:spPr>
+          <a:xfrm>
+            <a:off x="2070340" y="22136"/>
+            <a:ext cx="7513607" cy="6987242"/>
+          </a:xfrm>
+          <a:prstGeom prst="rect">
+            <a:avLst/>
+          </a:prstGeom>
+        </p:spPr>
+      </p:pic>
+    </p:spTree>
+    <p:extLst>
+      <p:ext uri="{BB962C8B-B14F-4D97-AF65-F5344CB8AC3E}">
+        <p14:creationId xmlns:p14="http://schemas.microsoft.com/office/powerpoint/2010/main" val="2926475536"/>
       </p:ext>
     </p:extLst>
   </p:cSld>
